--- a/public/lessons/year-6-maths/summer/week-30/assess-learning-and-plan-transition/teaching-powerpoint-v1.pptx
+++ b/public/lessons/year-6-maths/summer/week-30/assess-learning-and-plan-transition/teaching-powerpoint-v1.pptx
@@ -2,24 +2,24 @@
 <file path=ppt/presentation.xml><?xml version="1.0" encoding="utf-8"?>
 <p:presentation xmlns:p="http://schemas.openxmlformats.org/presentationml/2006/main">
   <p:sldMasterIdLst>
-    <p:sldMasterId xmlns:r="http://schemas.openxmlformats.org/officeDocument/2006/relationships" id="2147483648" r:id="R9d477da741fc4b6f"/>
+    <p:sldMasterId xmlns:r="http://schemas.openxmlformats.org/officeDocument/2006/relationships" id="2147483648" r:id="R922a41d6e7a9446a"/>
   </p:sldMasterIdLst>
   <p:notesMasterIdLst>
-    <p:notesMasterId xmlns:r="http://schemas.openxmlformats.org/officeDocument/2006/relationships" r:id="Rcbcb98ed8faf4f4f"/>
+    <p:notesMasterId xmlns:r="http://schemas.openxmlformats.org/officeDocument/2006/relationships" r:id="R4426770723304961"/>
   </p:notesMasterIdLst>
   <p:sldIdLst>
-    <p:sldId xmlns:r="http://schemas.openxmlformats.org/officeDocument/2006/relationships" id="256" r:id="R9b1c2fd39a034906"/>
-    <p:sldId xmlns:r="http://schemas.openxmlformats.org/officeDocument/2006/relationships" id="257" r:id="R828bee31ce9e45f5"/>
-    <p:sldId xmlns:r="http://schemas.openxmlformats.org/officeDocument/2006/relationships" id="258" r:id="R83578ddb4da54649"/>
-    <p:sldId xmlns:r="http://schemas.openxmlformats.org/officeDocument/2006/relationships" id="259" r:id="R9c5e4cd4ecba4ce5"/>
-    <p:sldId xmlns:r="http://schemas.openxmlformats.org/officeDocument/2006/relationships" id="260" r:id="R3438d58f47a54f54"/>
-    <p:sldId xmlns:r="http://schemas.openxmlformats.org/officeDocument/2006/relationships" id="261" r:id="R7f970f87d2944075"/>
-    <p:sldId xmlns:r="http://schemas.openxmlformats.org/officeDocument/2006/relationships" id="262" r:id="R5f212bf405414e62"/>
-    <p:sldId xmlns:r="http://schemas.openxmlformats.org/officeDocument/2006/relationships" id="263" r:id="R648a1f5862f94d10"/>
-    <p:sldId xmlns:r="http://schemas.openxmlformats.org/officeDocument/2006/relationships" id="264" r:id="Rea20526fd19344b3"/>
-    <p:sldId xmlns:r="http://schemas.openxmlformats.org/officeDocument/2006/relationships" id="265" r:id="R2da93fe6dbb248c8"/>
-    <p:sldId xmlns:r="http://schemas.openxmlformats.org/officeDocument/2006/relationships" id="266" r:id="R6b6230f6eab547aa"/>
-    <p:sldId xmlns:r="http://schemas.openxmlformats.org/officeDocument/2006/relationships" id="267" r:id="R1caa086ff6a64441"/>
+    <p:sldId xmlns:r="http://schemas.openxmlformats.org/officeDocument/2006/relationships" id="256" r:id="R750c4b304c8a49e1"/>
+    <p:sldId xmlns:r="http://schemas.openxmlformats.org/officeDocument/2006/relationships" id="257" r:id="R17145f7a65064e5c"/>
+    <p:sldId xmlns:r="http://schemas.openxmlformats.org/officeDocument/2006/relationships" id="258" r:id="R48e6ad7b26d14201"/>
+    <p:sldId xmlns:r="http://schemas.openxmlformats.org/officeDocument/2006/relationships" id="259" r:id="Ra288cfa0aaae4940"/>
+    <p:sldId xmlns:r="http://schemas.openxmlformats.org/officeDocument/2006/relationships" id="260" r:id="R366eb6f59e174121"/>
+    <p:sldId xmlns:r="http://schemas.openxmlformats.org/officeDocument/2006/relationships" id="261" r:id="R691acb15e7584ea4"/>
+    <p:sldId xmlns:r="http://schemas.openxmlformats.org/officeDocument/2006/relationships" id="262" r:id="R8d7480e68eef4d69"/>
+    <p:sldId xmlns:r="http://schemas.openxmlformats.org/officeDocument/2006/relationships" id="263" r:id="Rbe15df2075284d8a"/>
+    <p:sldId xmlns:r="http://schemas.openxmlformats.org/officeDocument/2006/relationships" id="264" r:id="R914eb6e8802e4134"/>
+    <p:sldId xmlns:r="http://schemas.openxmlformats.org/officeDocument/2006/relationships" id="265" r:id="Rf57a24036c924487"/>
+    <p:sldId xmlns:r="http://schemas.openxmlformats.org/officeDocument/2006/relationships" id="266" r:id="R6bcabf6463b54d44"/>
+    <p:sldId xmlns:r="http://schemas.openxmlformats.org/officeDocument/2006/relationships" id="267" r:id="R9bb1413f41d0436b"/>
   </p:sldIdLst>
   <p:sldSz cx="12192000" cy="6858000"/>
   <p:notesSz cx="6858000" cy="9144000"/>
@@ -873,7 +873,7 @@
           <a:lstStyle xmlns:a="http://schemas.openxmlformats.org/drawingml/2006/main"/>
           <a:p xmlns:a="http://schemas.openxmlformats.org/drawingml/2006/main">
             <a:r>
-              <a:t>I do. Reveal the question, setup and each calculation stage one click at a time. Pupils watch before copying. Model answer: 9 cm.</a:t>
+              <a:t>I do. Reveal the question, then reveal each mathematical change one click at a time. Point to the numbers and operation that changed before moving to the next line. Final answer: 9 cm.</a:t>
             </a:r>
           </a:p>
         </p:txBody>
@@ -1291,7 +1291,7 @@
   </p:cSld>
   <p:clrMap bg1="lt1" tx1="dk1" bg2="lt2" tx2="dk2" accent1="accent1" accent2="accent2" accent3="accent3" accent4="accent4" accent5="accent5" accent6="accent6" hlink="hlink" folHlink="folHlink"/>
   <p:sldLayoutIdLst>
-    <p:sldLayoutId xmlns:r="http://schemas.openxmlformats.org/officeDocument/2006/relationships" id="2147483649" r:id="R0b11735c7af74476"/>
+    <p:sldLayoutId xmlns:r="http://schemas.openxmlformats.org/officeDocument/2006/relationships" id="2147483649" r:id="R4629c2b6d8b64feb"/>
   </p:sldLayoutIdLst>
   <p:txStyles>
     <p:titleStyle>
@@ -1842,7 +1842,7 @@
           <p:cNvPr id="12" name="">
             <a:extLst xmlns:a="http://schemas.openxmlformats.org/drawingml/2006/main">
               <a:ext uri="{FF2B5EF4-FFF2-40B4-BE49-F238E27FC236}">
-                <a16:creationId xmlns:a16="http://schemas.microsoft.com/office/drawing/2014/main" id="{B49B50D1-1B45-4325-840E-D1023265A37B}"/>
+                <a16:creationId xmlns:a16="http://schemas.microsoft.com/office/drawing/2014/main" id="{ACB86613-88F0-46C8-AABC-6FB0738666BA}"/>
               </a:ext>
             </a:extLst>
           </p:cNvPr>
@@ -1874,7 +1874,7 @@
           <p:cNvPr id="2" name="">
             <a:extLst xmlns:a="http://schemas.openxmlformats.org/drawingml/2006/main">
               <a:ext uri="{FF2B5EF4-FFF2-40B4-BE49-F238E27FC236}">
-                <a16:creationId xmlns:a16="http://schemas.microsoft.com/office/drawing/2014/main" id="{CF51178A-2B2F-41A3-B025-2B2B31630C05}"/>
+                <a16:creationId xmlns:a16="http://schemas.microsoft.com/office/drawing/2014/main" id="{D07342D7-9808-4169-9539-FB7B7E022158}"/>
               </a:ext>
             </a:extLst>
           </p:cNvPr>
@@ -1931,7 +1931,7 @@
           <p:cNvPr id="3" name="">
             <a:extLst xmlns:a="http://schemas.openxmlformats.org/drawingml/2006/main">
               <a:ext uri="{FF2B5EF4-FFF2-40B4-BE49-F238E27FC236}">
-                <a16:creationId xmlns:a16="http://schemas.microsoft.com/office/drawing/2014/main" id="{C7423EA8-DC64-43DF-8AE8-B2993782E6FC}"/>
+                <a16:creationId xmlns:a16="http://schemas.microsoft.com/office/drawing/2014/main" id="{56A86B02-88FF-43D6-94C2-D9D59F660B97}"/>
               </a:ext>
             </a:extLst>
           </p:cNvPr>
@@ -1965,7 +1965,7 @@
           <p:cNvPr id="4" name="">
             <a:extLst xmlns:a="http://schemas.openxmlformats.org/drawingml/2006/main">
               <a:ext uri="{FF2B5EF4-FFF2-40B4-BE49-F238E27FC236}">
-                <a16:creationId xmlns:a16="http://schemas.microsoft.com/office/drawing/2014/main" id="{64DEAE2C-CE18-4FF9-BF78-454407C68F77}"/>
+                <a16:creationId xmlns:a16="http://schemas.microsoft.com/office/drawing/2014/main" id="{E02AF5DE-4D5B-4CC3-AEFC-32DB3DB4F8C5}"/>
               </a:ext>
             </a:extLst>
           </p:cNvPr>
@@ -2022,7 +2022,7 @@
           <p:cNvPr id="5" name="">
             <a:extLst xmlns:a="http://schemas.openxmlformats.org/drawingml/2006/main">
               <a:ext uri="{FF2B5EF4-FFF2-40B4-BE49-F238E27FC236}">
-                <a16:creationId xmlns:a16="http://schemas.microsoft.com/office/drawing/2014/main" id="{8A94E877-6A86-4204-AA46-D522C49629C1}"/>
+                <a16:creationId xmlns:a16="http://schemas.microsoft.com/office/drawing/2014/main" id="{D5F8B84A-44AD-4B7E-9138-5D4EB4073F72}"/>
               </a:ext>
             </a:extLst>
           </p:cNvPr>
@@ -2079,7 +2079,7 @@
           <p:cNvPr id="6" name="">
             <a:extLst xmlns:a="http://schemas.openxmlformats.org/drawingml/2006/main">
               <a:ext uri="{FF2B5EF4-FFF2-40B4-BE49-F238E27FC236}">
-                <a16:creationId xmlns:a16="http://schemas.microsoft.com/office/drawing/2014/main" id="{5403E509-7171-459F-A887-F29C660F25BA}"/>
+                <a16:creationId xmlns:a16="http://schemas.microsoft.com/office/drawing/2014/main" id="{E23B0213-E9E8-476B-83D0-18C8F908C72A}"/>
               </a:ext>
             </a:extLst>
           </p:cNvPr>
@@ -2113,7 +2113,7 @@
           <p:cNvPr id="7" name="">
             <a:extLst xmlns:a="http://schemas.openxmlformats.org/drawingml/2006/main">
               <a:ext uri="{FF2B5EF4-FFF2-40B4-BE49-F238E27FC236}">
-                <a16:creationId xmlns:a16="http://schemas.microsoft.com/office/drawing/2014/main" id="{B8922ACF-08BB-4CF0-8A32-758335AA97CC}"/>
+                <a16:creationId xmlns:a16="http://schemas.microsoft.com/office/drawing/2014/main" id="{34CE5D09-6E3E-4665-859E-85D8BF1C9037}"/>
               </a:ext>
             </a:extLst>
           </p:cNvPr>
@@ -2170,7 +2170,7 @@
           <p:cNvPr id="8" name="">
             <a:extLst xmlns:a="http://schemas.openxmlformats.org/drawingml/2006/main">
               <a:ext uri="{FF2B5EF4-FFF2-40B4-BE49-F238E27FC236}">
-                <a16:creationId xmlns:a16="http://schemas.microsoft.com/office/drawing/2014/main" id="{A7B3C590-3DD9-4CA8-9226-D22B9548BBA9}"/>
+                <a16:creationId xmlns:a16="http://schemas.microsoft.com/office/drawing/2014/main" id="{445F6986-BAC7-4A4E-8E43-157925AB1146}"/>
               </a:ext>
             </a:extLst>
           </p:cNvPr>
@@ -2227,7 +2227,7 @@
           <p:cNvPr id="9" name="">
             <a:extLst xmlns:a="http://schemas.openxmlformats.org/drawingml/2006/main">
               <a:ext uri="{FF2B5EF4-FFF2-40B4-BE49-F238E27FC236}">
-                <a16:creationId xmlns:a16="http://schemas.microsoft.com/office/drawing/2014/main" id="{E09DB21B-6837-466D-B605-924510A94310}"/>
+                <a16:creationId xmlns:a16="http://schemas.microsoft.com/office/drawing/2014/main" id="{53065325-4922-4E7C-99D0-E300285E16BB}"/>
               </a:ext>
             </a:extLst>
           </p:cNvPr>
@@ -2284,7 +2284,7 @@
           <p:cNvPr id="10" name="">
             <a:extLst xmlns:a="http://schemas.openxmlformats.org/drawingml/2006/main">
               <a:ext uri="{FF2B5EF4-FFF2-40B4-BE49-F238E27FC236}">
-                <a16:creationId xmlns:a16="http://schemas.microsoft.com/office/drawing/2014/main" id="{B2DAB2A8-A7B4-4B8C-B92B-296A0A674B54}"/>
+                <a16:creationId xmlns:a16="http://schemas.microsoft.com/office/drawing/2014/main" id="{779DFFB8-6569-4D52-B3F3-27316AF24EC3}"/>
               </a:ext>
             </a:extLst>
           </p:cNvPr>
@@ -2341,7 +2341,7 @@
           <p:cNvPr id="11" name="">
             <a:extLst xmlns:a="http://schemas.openxmlformats.org/drawingml/2006/main">
               <a:ext uri="{FF2B5EF4-FFF2-40B4-BE49-F238E27FC236}">
-                <a16:creationId xmlns:a16="http://schemas.microsoft.com/office/drawing/2014/main" id="{9D4CE6BB-E4E6-47A5-957B-D200059CA462}"/>
+                <a16:creationId xmlns:a16="http://schemas.microsoft.com/office/drawing/2014/main" id="{F780AA61-0679-4736-80C1-DEE9FEFEB655}"/>
               </a:ext>
             </a:extLst>
           </p:cNvPr>
@@ -2396,7 +2396,7 @@
     </p:spTree>
     <p:extLst>
       <p:ext uri="{BB962C8B-B14F-4D97-AF65-F5344CB8AC3E}">
-        <p14:creationId xmlns:p14="http://schemas.microsoft.com/office/powerpoint/2010/main" val="723630776"/>
+        <p14:creationId xmlns:p14="http://schemas.microsoft.com/office/powerpoint/2010/main" val="373706409"/>
       </p:ext>
     </p:extLst>
   </p:cSld>
@@ -2427,7 +2427,7 @@
           <p:cNvPr id="14" name="">
             <a:extLst xmlns:a="http://schemas.openxmlformats.org/drawingml/2006/main">
               <a:ext uri="{FF2B5EF4-FFF2-40B4-BE49-F238E27FC236}">
-                <a16:creationId xmlns:a16="http://schemas.microsoft.com/office/drawing/2014/main" id="{B5CE7974-81D5-43D4-9F6D-9C6516504687}"/>
+                <a16:creationId xmlns:a16="http://schemas.microsoft.com/office/drawing/2014/main" id="{0F7D0B9D-E143-4654-AA68-4CCD13F48881}"/>
               </a:ext>
             </a:extLst>
           </p:cNvPr>
@@ -2459,7 +2459,7 @@
           <p:cNvPr id="2" name="">
             <a:extLst xmlns:a="http://schemas.openxmlformats.org/drawingml/2006/main">
               <a:ext uri="{FF2B5EF4-FFF2-40B4-BE49-F238E27FC236}">
-                <a16:creationId xmlns:a16="http://schemas.microsoft.com/office/drawing/2014/main" id="{6162B628-8007-4DDF-B47A-9E75AA72C7E4}"/>
+                <a16:creationId xmlns:a16="http://schemas.microsoft.com/office/drawing/2014/main" id="{93A0A8D4-232C-421B-8320-381D82DF4C18}"/>
               </a:ext>
             </a:extLst>
           </p:cNvPr>
@@ -2516,7 +2516,7 @@
           <p:cNvPr id="3" name="">
             <a:extLst xmlns:a="http://schemas.openxmlformats.org/drawingml/2006/main">
               <a:ext uri="{FF2B5EF4-FFF2-40B4-BE49-F238E27FC236}">
-                <a16:creationId xmlns:a16="http://schemas.microsoft.com/office/drawing/2014/main" id="{84791003-EE62-46FD-8224-78D525377267}"/>
+                <a16:creationId xmlns:a16="http://schemas.microsoft.com/office/drawing/2014/main" id="{67551985-C446-4B0F-A3E9-1166EC27B9D4}"/>
               </a:ext>
             </a:extLst>
           </p:cNvPr>
@@ -2548,7 +2548,7 @@
           <p:cNvPr id="4" name="">
             <a:extLst xmlns:a="http://schemas.openxmlformats.org/drawingml/2006/main">
               <a:ext uri="{FF2B5EF4-FFF2-40B4-BE49-F238E27FC236}">
-                <a16:creationId xmlns:a16="http://schemas.microsoft.com/office/drawing/2014/main" id="{4ABA1C22-4E3E-4B78-9829-156FD85B5299}"/>
+                <a16:creationId xmlns:a16="http://schemas.microsoft.com/office/drawing/2014/main" id="{902D270A-1E00-4A9C-87A9-098E78B8AA7B}"/>
               </a:ext>
             </a:extLst>
           </p:cNvPr>
@@ -2605,7 +2605,7 @@
           <p:cNvPr id="5" name="">
             <a:extLst xmlns:a="http://schemas.openxmlformats.org/drawingml/2006/main">
               <a:ext uri="{FF2B5EF4-FFF2-40B4-BE49-F238E27FC236}">
-                <a16:creationId xmlns:a16="http://schemas.microsoft.com/office/drawing/2014/main" id="{9EEBF705-1DF2-4200-9FD7-B68F0712CC8A}"/>
+                <a16:creationId xmlns:a16="http://schemas.microsoft.com/office/drawing/2014/main" id="{60C38DD8-87D6-4EB2-A9B9-C837F601A5BF}"/>
               </a:ext>
             </a:extLst>
           </p:cNvPr>
@@ -2662,7 +2662,7 @@
           <p:cNvPr id="6" name="">
             <a:extLst xmlns:a="http://schemas.openxmlformats.org/drawingml/2006/main">
               <a:ext uri="{FF2B5EF4-FFF2-40B4-BE49-F238E27FC236}">
-                <a16:creationId xmlns:a16="http://schemas.microsoft.com/office/drawing/2014/main" id="{36BA9B34-3A7D-4489-9584-E9D50BB251AC}"/>
+                <a16:creationId xmlns:a16="http://schemas.microsoft.com/office/drawing/2014/main" id="{7C7E452F-F2C0-4199-B442-BBECB239FF57}"/>
               </a:ext>
             </a:extLst>
           </p:cNvPr>
@@ -2719,7 +2719,7 @@
           <p:cNvPr id="7" name="">
             <a:extLst xmlns:a="http://schemas.openxmlformats.org/drawingml/2006/main">
               <a:ext uri="{FF2B5EF4-FFF2-40B4-BE49-F238E27FC236}">
-                <a16:creationId xmlns:a16="http://schemas.microsoft.com/office/drawing/2014/main" id="{C8075FDA-9D45-4CFA-97F2-353EE167CB22}"/>
+                <a16:creationId xmlns:a16="http://schemas.microsoft.com/office/drawing/2014/main" id="{839C313E-2B9C-4DEF-8276-ADD558FD336D}"/>
               </a:ext>
             </a:extLst>
           </p:cNvPr>
@@ -2751,7 +2751,7 @@
           <p:cNvPr id="8" name="">
             <a:extLst xmlns:a="http://schemas.openxmlformats.org/drawingml/2006/main">
               <a:ext uri="{FF2B5EF4-FFF2-40B4-BE49-F238E27FC236}">
-                <a16:creationId xmlns:a16="http://schemas.microsoft.com/office/drawing/2014/main" id="{8F186664-A8BA-4BF1-B53D-387C64C57654}"/>
+                <a16:creationId xmlns:a16="http://schemas.microsoft.com/office/drawing/2014/main" id="{7D41291F-9AFD-4DE7-98B9-3C615D17DC09}"/>
               </a:ext>
             </a:extLst>
           </p:cNvPr>
@@ -2808,7 +2808,7 @@
           <p:cNvPr id="9" name="">
             <a:extLst xmlns:a="http://schemas.openxmlformats.org/drawingml/2006/main">
               <a:ext uri="{FF2B5EF4-FFF2-40B4-BE49-F238E27FC236}">
-                <a16:creationId xmlns:a16="http://schemas.microsoft.com/office/drawing/2014/main" id="{556F5848-8263-4718-B816-3DF64FA058D3}"/>
+                <a16:creationId xmlns:a16="http://schemas.microsoft.com/office/drawing/2014/main" id="{9835AB37-7D7D-4E93-817C-A6B196B5F7C5}"/>
               </a:ext>
             </a:extLst>
           </p:cNvPr>
@@ -2865,7 +2865,7 @@
           <p:cNvPr id="10" name="">
             <a:extLst xmlns:a="http://schemas.openxmlformats.org/drawingml/2006/main">
               <a:ext uri="{FF2B5EF4-FFF2-40B4-BE49-F238E27FC236}">
-                <a16:creationId xmlns:a16="http://schemas.microsoft.com/office/drawing/2014/main" id="{063ACB72-E880-44B0-94E9-BE8046A8401E}"/>
+                <a16:creationId xmlns:a16="http://schemas.microsoft.com/office/drawing/2014/main" id="{6EDFDB1B-2544-4C4B-901A-BEA36624F915}"/>
               </a:ext>
             </a:extLst>
           </p:cNvPr>
@@ -2922,7 +2922,7 @@
           <p:cNvPr id="11" name="">
             <a:extLst xmlns:a="http://schemas.openxmlformats.org/drawingml/2006/main">
               <a:ext uri="{FF2B5EF4-FFF2-40B4-BE49-F238E27FC236}">
-                <a16:creationId xmlns:a16="http://schemas.microsoft.com/office/drawing/2014/main" id="{5B84E962-A065-4E75-B445-F03DABBD8591}"/>
+                <a16:creationId xmlns:a16="http://schemas.microsoft.com/office/drawing/2014/main" id="{FE4B9FF4-3192-43E9-9B70-C3E243392AEA}"/>
               </a:ext>
             </a:extLst>
           </p:cNvPr>
@@ -2979,7 +2979,7 @@
           <p:cNvPr id="12" name="">
             <a:extLst xmlns:a="http://schemas.openxmlformats.org/drawingml/2006/main">
               <a:ext uri="{FF2B5EF4-FFF2-40B4-BE49-F238E27FC236}">
-                <a16:creationId xmlns:a16="http://schemas.microsoft.com/office/drawing/2014/main" id="{39499E81-DFE8-4899-8BC3-8B725971A77B}"/>
+                <a16:creationId xmlns:a16="http://schemas.microsoft.com/office/drawing/2014/main" id="{7F5353A6-73AC-4ED9-90F8-2188D2106D2C}"/>
               </a:ext>
             </a:extLst>
           </p:cNvPr>
@@ -3036,7 +3036,7 @@
           <p:cNvPr id="13" name="">
             <a:extLst xmlns:a="http://schemas.openxmlformats.org/drawingml/2006/main">
               <a:ext uri="{FF2B5EF4-FFF2-40B4-BE49-F238E27FC236}">
-                <a16:creationId xmlns:a16="http://schemas.microsoft.com/office/drawing/2014/main" id="{23302778-8D39-4334-B0F2-A69BFE9E8E7B}"/>
+                <a16:creationId xmlns:a16="http://schemas.microsoft.com/office/drawing/2014/main" id="{F03B8501-4099-40B6-A7B9-3ABAB068747C}"/>
               </a:ext>
             </a:extLst>
           </p:cNvPr>
@@ -3091,7 +3091,7 @@
     </p:spTree>
     <p:extLst>
       <p:ext uri="{BB962C8B-B14F-4D97-AF65-F5344CB8AC3E}">
-        <p14:creationId xmlns:p14="http://schemas.microsoft.com/office/powerpoint/2010/main" val="1163539135"/>
+        <p14:creationId xmlns:p14="http://schemas.microsoft.com/office/powerpoint/2010/main" val="325546351"/>
       </p:ext>
     </p:extLst>
   </p:cSld>
@@ -3292,7 +3292,7 @@
           <p:cNvPr id="19" name="">
             <a:extLst xmlns:a="http://schemas.openxmlformats.org/drawingml/2006/main">
               <a:ext uri="{FF2B5EF4-FFF2-40B4-BE49-F238E27FC236}">
-                <a16:creationId xmlns:a16="http://schemas.microsoft.com/office/drawing/2014/main" id="{4E482FA4-7835-4086-8C92-2AF63E798B4D}"/>
+                <a16:creationId xmlns:a16="http://schemas.microsoft.com/office/drawing/2014/main" id="{8EED8429-311F-4BFC-B289-4C5BFF8682F0}"/>
               </a:ext>
             </a:extLst>
           </p:cNvPr>
@@ -3324,7 +3324,7 @@
           <p:cNvPr id="2" name="">
             <a:extLst xmlns:a="http://schemas.openxmlformats.org/drawingml/2006/main">
               <a:ext uri="{FF2B5EF4-FFF2-40B4-BE49-F238E27FC236}">
-                <a16:creationId xmlns:a16="http://schemas.microsoft.com/office/drawing/2014/main" id="{B7B9B8BD-BA2F-4E5A-AB5E-BAE32A37F7DD}"/>
+                <a16:creationId xmlns:a16="http://schemas.microsoft.com/office/drawing/2014/main" id="{58033D0F-5542-4748-A985-37D0B0987653}"/>
               </a:ext>
             </a:extLst>
           </p:cNvPr>
@@ -3381,7 +3381,7 @@
           <p:cNvPr id="3" name="">
             <a:extLst xmlns:a="http://schemas.openxmlformats.org/drawingml/2006/main">
               <a:ext uri="{FF2B5EF4-FFF2-40B4-BE49-F238E27FC236}">
-                <a16:creationId xmlns:a16="http://schemas.microsoft.com/office/drawing/2014/main" id="{3916148C-5ADA-4EF6-AF19-C741C18E279B}"/>
+                <a16:creationId xmlns:a16="http://schemas.microsoft.com/office/drawing/2014/main" id="{6688345C-C359-4DA0-8A64-8002B1508690}"/>
               </a:ext>
             </a:extLst>
           </p:cNvPr>
@@ -3413,7 +3413,7 @@
           <p:cNvPr id="4" name="">
             <a:extLst xmlns:a="http://schemas.openxmlformats.org/drawingml/2006/main">
               <a:ext uri="{FF2B5EF4-FFF2-40B4-BE49-F238E27FC236}">
-                <a16:creationId xmlns:a16="http://schemas.microsoft.com/office/drawing/2014/main" id="{4470915C-C330-4941-915E-0C60F1D55FBC}"/>
+                <a16:creationId xmlns:a16="http://schemas.microsoft.com/office/drawing/2014/main" id="{E0F792DC-650E-468E-A2A4-75A6CF56EBA2}"/>
               </a:ext>
             </a:extLst>
           </p:cNvPr>
@@ -3470,7 +3470,7 @@
           <p:cNvPr id="5" name="">
             <a:extLst xmlns:a="http://schemas.openxmlformats.org/drawingml/2006/main">
               <a:ext uri="{FF2B5EF4-FFF2-40B4-BE49-F238E27FC236}">
-                <a16:creationId xmlns:a16="http://schemas.microsoft.com/office/drawing/2014/main" id="{CF931848-BA63-4B92-A568-484308970330}"/>
+                <a16:creationId xmlns:a16="http://schemas.microsoft.com/office/drawing/2014/main" id="{471D5DD1-511A-4A1E-ACB2-31F7A26AC896}"/>
               </a:ext>
             </a:extLst>
           </p:cNvPr>
@@ -3527,7 +3527,7 @@
           <p:cNvPr id="6" name="">
             <a:extLst xmlns:a="http://schemas.openxmlformats.org/drawingml/2006/main">
               <a:ext uri="{FF2B5EF4-FFF2-40B4-BE49-F238E27FC236}">
-                <a16:creationId xmlns:a16="http://schemas.microsoft.com/office/drawing/2014/main" id="{3C01D27C-E64B-482C-B922-D21B73499015}"/>
+                <a16:creationId xmlns:a16="http://schemas.microsoft.com/office/drawing/2014/main" id="{A6197020-0355-4F95-A32E-07E6C7BE02AD}"/>
               </a:ext>
             </a:extLst>
           </p:cNvPr>
@@ -3584,7 +3584,7 @@
           <p:cNvPr id="7" name="">
             <a:extLst xmlns:a="http://schemas.openxmlformats.org/drawingml/2006/main">
               <a:ext uri="{FF2B5EF4-FFF2-40B4-BE49-F238E27FC236}">
-                <a16:creationId xmlns:a16="http://schemas.microsoft.com/office/drawing/2014/main" id="{F8125F59-B28E-4742-A003-A5FFBF03FE9B}"/>
+                <a16:creationId xmlns:a16="http://schemas.microsoft.com/office/drawing/2014/main" id="{6C23D9F5-9FAD-4C8B-B2EF-28F1403186AE}"/>
               </a:ext>
             </a:extLst>
           </p:cNvPr>
@@ -3616,7 +3616,7 @@
           <p:cNvPr id="8" name="">
             <a:extLst xmlns:a="http://schemas.openxmlformats.org/drawingml/2006/main">
               <a:ext uri="{FF2B5EF4-FFF2-40B4-BE49-F238E27FC236}">
-                <a16:creationId xmlns:a16="http://schemas.microsoft.com/office/drawing/2014/main" id="{C0163167-75DD-48C2-B377-394833BD1735}"/>
+                <a16:creationId xmlns:a16="http://schemas.microsoft.com/office/drawing/2014/main" id="{FB3BD0B9-6A18-4C35-91E8-65170B9FD9DC}"/>
               </a:ext>
             </a:extLst>
           </p:cNvPr>
@@ -3673,7 +3673,7 @@
           <p:cNvPr id="9" name="">
             <a:extLst xmlns:a="http://schemas.openxmlformats.org/drawingml/2006/main">
               <a:ext uri="{FF2B5EF4-FFF2-40B4-BE49-F238E27FC236}">
-                <a16:creationId xmlns:a16="http://schemas.microsoft.com/office/drawing/2014/main" id="{077F149C-D79B-4679-AA02-08B87F6C670E}"/>
+                <a16:creationId xmlns:a16="http://schemas.microsoft.com/office/drawing/2014/main" id="{B9255138-82EC-489E-A3D0-8D85B917D642}"/>
               </a:ext>
             </a:extLst>
           </p:cNvPr>
@@ -3730,7 +3730,7 @@
           <p:cNvPr id="10" name="">
             <a:extLst xmlns:a="http://schemas.openxmlformats.org/drawingml/2006/main">
               <a:ext uri="{FF2B5EF4-FFF2-40B4-BE49-F238E27FC236}">
-                <a16:creationId xmlns:a16="http://schemas.microsoft.com/office/drawing/2014/main" id="{E1A617DC-46F4-4E2A-A7F0-CF5CC5C3F90D}"/>
+                <a16:creationId xmlns:a16="http://schemas.microsoft.com/office/drawing/2014/main" id="{88AF1713-9546-4011-8D10-48B895827F06}"/>
               </a:ext>
             </a:extLst>
           </p:cNvPr>
@@ -3787,7 +3787,7 @@
           <p:cNvPr id="11" name="">
             <a:extLst xmlns:a="http://schemas.openxmlformats.org/drawingml/2006/main">
               <a:ext uri="{FF2B5EF4-FFF2-40B4-BE49-F238E27FC236}">
-                <a16:creationId xmlns:a16="http://schemas.microsoft.com/office/drawing/2014/main" id="{370BBBEA-5C2C-4261-B83E-BFE9F746177B}"/>
+                <a16:creationId xmlns:a16="http://schemas.microsoft.com/office/drawing/2014/main" id="{51BA8892-4782-4611-B626-4FCC3A0EA38C}"/>
               </a:ext>
             </a:extLst>
           </p:cNvPr>
@@ -3821,7 +3821,7 @@
           <p:cNvPr id="12" name="">
             <a:extLst xmlns:a="http://schemas.openxmlformats.org/drawingml/2006/main">
               <a:ext uri="{FF2B5EF4-FFF2-40B4-BE49-F238E27FC236}">
-                <a16:creationId xmlns:a16="http://schemas.microsoft.com/office/drawing/2014/main" id="{336334E3-B565-4291-B4CB-309DBEF04ED3}"/>
+                <a16:creationId xmlns:a16="http://schemas.microsoft.com/office/drawing/2014/main" id="{A798F831-E612-40E9-B457-A8611814724B}"/>
               </a:ext>
             </a:extLst>
           </p:cNvPr>
@@ -3878,7 +3878,7 @@
           <p:cNvPr id="13" name="">
             <a:extLst xmlns:a="http://schemas.openxmlformats.org/drawingml/2006/main">
               <a:ext uri="{FF2B5EF4-FFF2-40B4-BE49-F238E27FC236}">
-                <a16:creationId xmlns:a16="http://schemas.microsoft.com/office/drawing/2014/main" id="{53085A92-68EA-4170-A2D9-FA23F5174E23}"/>
+                <a16:creationId xmlns:a16="http://schemas.microsoft.com/office/drawing/2014/main" id="{55E87CF9-5306-4066-8C75-B830EC4E4C8B}"/>
               </a:ext>
             </a:extLst>
           </p:cNvPr>
@@ -3935,7 +3935,7 @@
           <p:cNvPr id="14" name="">
             <a:extLst xmlns:a="http://schemas.openxmlformats.org/drawingml/2006/main">
               <a:ext uri="{FF2B5EF4-FFF2-40B4-BE49-F238E27FC236}">
-                <a16:creationId xmlns:a16="http://schemas.microsoft.com/office/drawing/2014/main" id="{9613BC81-69F9-42AD-B164-E9755FED315C}"/>
+                <a16:creationId xmlns:a16="http://schemas.microsoft.com/office/drawing/2014/main" id="{4EF4619B-AEBC-4DC9-9629-1ACEB8EB232A}"/>
               </a:ext>
             </a:extLst>
           </p:cNvPr>
@@ -3992,7 +3992,7 @@
           <p:cNvPr id="15" name="">
             <a:extLst xmlns:a="http://schemas.openxmlformats.org/drawingml/2006/main">
               <a:ext uri="{FF2B5EF4-FFF2-40B4-BE49-F238E27FC236}">
-                <a16:creationId xmlns:a16="http://schemas.microsoft.com/office/drawing/2014/main" id="{B8C461BD-D48F-460F-B861-681A6DE4C7A1}"/>
+                <a16:creationId xmlns:a16="http://schemas.microsoft.com/office/drawing/2014/main" id="{BB270942-38F2-43FF-86B0-0016AF16AA18}"/>
               </a:ext>
             </a:extLst>
           </p:cNvPr>
@@ -4026,7 +4026,7 @@
           <p:cNvPr id="16" name="">
             <a:extLst xmlns:a="http://schemas.openxmlformats.org/drawingml/2006/main">
               <a:ext uri="{FF2B5EF4-FFF2-40B4-BE49-F238E27FC236}">
-                <a16:creationId xmlns:a16="http://schemas.microsoft.com/office/drawing/2014/main" id="{C76D5280-C68D-48D0-8A8E-F3B65291F1C5}"/>
+                <a16:creationId xmlns:a16="http://schemas.microsoft.com/office/drawing/2014/main" id="{C5C1656E-1F61-4B4A-80CD-2299B34B4F7E}"/>
               </a:ext>
             </a:extLst>
           </p:cNvPr>
@@ -4083,7 +4083,7 @@
           <p:cNvPr id="17" name="">
             <a:extLst xmlns:a="http://schemas.openxmlformats.org/drawingml/2006/main">
               <a:ext uri="{FF2B5EF4-FFF2-40B4-BE49-F238E27FC236}">
-                <a16:creationId xmlns:a16="http://schemas.microsoft.com/office/drawing/2014/main" id="{B307D63E-39AB-4814-B5D3-3BB96CF66A70}"/>
+                <a16:creationId xmlns:a16="http://schemas.microsoft.com/office/drawing/2014/main" id="{27B080D5-EB61-45D3-8E8E-D456A42BD257}"/>
               </a:ext>
             </a:extLst>
           </p:cNvPr>
@@ -4140,7 +4140,7 @@
           <p:cNvPr id="18" name="">
             <a:extLst xmlns:a="http://schemas.openxmlformats.org/drawingml/2006/main">
               <a:ext uri="{FF2B5EF4-FFF2-40B4-BE49-F238E27FC236}">
-                <a16:creationId xmlns:a16="http://schemas.microsoft.com/office/drawing/2014/main" id="{2F18EEB0-35F2-4FD6-9FED-96CCDE99E75B}"/>
+                <a16:creationId xmlns:a16="http://schemas.microsoft.com/office/drawing/2014/main" id="{9ECE4046-8D74-4A4A-9317-0C20E7846E1E}"/>
               </a:ext>
             </a:extLst>
           </p:cNvPr>
@@ -4195,7 +4195,7 @@
     </p:spTree>
     <p:extLst>
       <p:ext uri="{BB962C8B-B14F-4D97-AF65-F5344CB8AC3E}">
-        <p14:creationId xmlns:p14="http://schemas.microsoft.com/office/powerpoint/2010/main" val="1541038483"/>
+        <p14:creationId xmlns:p14="http://schemas.microsoft.com/office/powerpoint/2010/main" val="1250247493"/>
       </p:ext>
     </p:extLst>
   </p:cSld>
@@ -4350,7 +4350,7 @@
           <p:cNvPr id="23" name="">
             <a:extLst xmlns:a="http://schemas.openxmlformats.org/drawingml/2006/main">
               <a:ext uri="{FF2B5EF4-FFF2-40B4-BE49-F238E27FC236}">
-                <a16:creationId xmlns:a16="http://schemas.microsoft.com/office/drawing/2014/main" id="{62DAB8E1-D367-4D10-8A6A-489ACEFDE54F}"/>
+                <a16:creationId xmlns:a16="http://schemas.microsoft.com/office/drawing/2014/main" id="{B3EDB5A4-C83A-4BD1-9915-D4FBA27F2E79}"/>
               </a:ext>
             </a:extLst>
           </p:cNvPr>
@@ -4382,7 +4382,7 @@
           <p:cNvPr id="2" name="">
             <a:extLst xmlns:a="http://schemas.openxmlformats.org/drawingml/2006/main">
               <a:ext uri="{FF2B5EF4-FFF2-40B4-BE49-F238E27FC236}">
-                <a16:creationId xmlns:a16="http://schemas.microsoft.com/office/drawing/2014/main" id="{537AD16D-7BF6-48CB-A268-67D539ACD28E}"/>
+                <a16:creationId xmlns:a16="http://schemas.microsoft.com/office/drawing/2014/main" id="{56C124D4-01CB-4314-A72B-7C09A18D0B76}"/>
               </a:ext>
             </a:extLst>
           </p:cNvPr>
@@ -4439,7 +4439,7 @@
           <p:cNvPr id="3" name="">
             <a:extLst xmlns:a="http://schemas.openxmlformats.org/drawingml/2006/main">
               <a:ext uri="{FF2B5EF4-FFF2-40B4-BE49-F238E27FC236}">
-                <a16:creationId xmlns:a16="http://schemas.microsoft.com/office/drawing/2014/main" id="{42C55BB8-F59D-481E-9337-A46DD275B2D6}"/>
+                <a16:creationId xmlns:a16="http://schemas.microsoft.com/office/drawing/2014/main" id="{A24C1CC0-0586-478A-8304-81A0E2A6EA80}"/>
               </a:ext>
             </a:extLst>
           </p:cNvPr>
@@ -4471,7 +4471,7 @@
           <p:cNvPr id="4" name="">
             <a:extLst xmlns:a="http://schemas.openxmlformats.org/drawingml/2006/main">
               <a:ext uri="{FF2B5EF4-FFF2-40B4-BE49-F238E27FC236}">
-                <a16:creationId xmlns:a16="http://schemas.microsoft.com/office/drawing/2014/main" id="{C96F3BDA-84C5-430F-B65F-C885CC319128}"/>
+                <a16:creationId xmlns:a16="http://schemas.microsoft.com/office/drawing/2014/main" id="{A86FFB03-643B-4931-9535-15EE3C83AE14}"/>
               </a:ext>
             </a:extLst>
           </p:cNvPr>
@@ -4528,7 +4528,7 @@
           <p:cNvPr id="5" name="">
             <a:extLst xmlns:a="http://schemas.openxmlformats.org/drawingml/2006/main">
               <a:ext uri="{FF2B5EF4-FFF2-40B4-BE49-F238E27FC236}">
-                <a16:creationId xmlns:a16="http://schemas.microsoft.com/office/drawing/2014/main" id="{9376B4E0-4503-4B6E-9B91-40BF4C7EFC2B}"/>
+                <a16:creationId xmlns:a16="http://schemas.microsoft.com/office/drawing/2014/main" id="{D40E5A83-533E-4753-ADFE-DE285361C257}"/>
               </a:ext>
             </a:extLst>
           </p:cNvPr>
@@ -4585,7 +4585,7 @@
           <p:cNvPr id="6" name="">
             <a:extLst xmlns:a="http://schemas.openxmlformats.org/drawingml/2006/main">
               <a:ext uri="{FF2B5EF4-FFF2-40B4-BE49-F238E27FC236}">
-                <a16:creationId xmlns:a16="http://schemas.microsoft.com/office/drawing/2014/main" id="{F30AEAE6-827C-47EB-80C4-73790E115CA8}"/>
+                <a16:creationId xmlns:a16="http://schemas.microsoft.com/office/drawing/2014/main" id="{DFCCE76C-7D4C-4489-830F-E366884D8ECE}"/>
               </a:ext>
             </a:extLst>
           </p:cNvPr>
@@ -4642,7 +4642,7 @@
           <p:cNvPr id="7" name="">
             <a:extLst xmlns:a="http://schemas.openxmlformats.org/drawingml/2006/main">
               <a:ext uri="{FF2B5EF4-FFF2-40B4-BE49-F238E27FC236}">
-                <a16:creationId xmlns:a16="http://schemas.microsoft.com/office/drawing/2014/main" id="{F6D63122-BBD2-4D5B-A36C-DAB29518DF10}"/>
+                <a16:creationId xmlns:a16="http://schemas.microsoft.com/office/drawing/2014/main" id="{F6D5525C-BE94-4CFC-8798-C6BC95500DFD}"/>
               </a:ext>
             </a:extLst>
           </p:cNvPr>
@@ -4674,7 +4674,7 @@
           <p:cNvPr id="8" name="">
             <a:extLst xmlns:a="http://schemas.openxmlformats.org/drawingml/2006/main">
               <a:ext uri="{FF2B5EF4-FFF2-40B4-BE49-F238E27FC236}">
-                <a16:creationId xmlns:a16="http://schemas.microsoft.com/office/drawing/2014/main" id="{CDD86259-AD9D-4505-83CD-A9FA86551C01}"/>
+                <a16:creationId xmlns:a16="http://schemas.microsoft.com/office/drawing/2014/main" id="{36B48C9F-35DC-4C87-B19C-9291DED3E562}"/>
               </a:ext>
             </a:extLst>
           </p:cNvPr>
@@ -4731,7 +4731,7 @@
           <p:cNvPr id="9" name="">
             <a:extLst xmlns:a="http://schemas.openxmlformats.org/drawingml/2006/main">
               <a:ext uri="{FF2B5EF4-FFF2-40B4-BE49-F238E27FC236}">
-                <a16:creationId xmlns:a16="http://schemas.microsoft.com/office/drawing/2014/main" id="{585ECCDF-41F5-4F20-A310-14678F323693}"/>
+                <a16:creationId xmlns:a16="http://schemas.microsoft.com/office/drawing/2014/main" id="{517FC255-06E7-4B16-A015-0180DFBBE98C}"/>
               </a:ext>
             </a:extLst>
           </p:cNvPr>
@@ -4788,7 +4788,7 @@
           <p:cNvPr id="10" name="">
             <a:extLst xmlns:a="http://schemas.openxmlformats.org/drawingml/2006/main">
               <a:ext uri="{FF2B5EF4-FFF2-40B4-BE49-F238E27FC236}">
-                <a16:creationId xmlns:a16="http://schemas.microsoft.com/office/drawing/2014/main" id="{68D8D770-1CF5-4DF1-BDA2-9E83C66F40E1}"/>
+                <a16:creationId xmlns:a16="http://schemas.microsoft.com/office/drawing/2014/main" id="{CE0A8D13-395D-4D0A-8151-C76A635A3C87}"/>
               </a:ext>
             </a:extLst>
           </p:cNvPr>
@@ -4822,7 +4822,7 @@
           <p:cNvPr id="11" name="">
             <a:extLst xmlns:a="http://schemas.openxmlformats.org/drawingml/2006/main">
               <a:ext uri="{FF2B5EF4-FFF2-40B4-BE49-F238E27FC236}">
-                <a16:creationId xmlns:a16="http://schemas.microsoft.com/office/drawing/2014/main" id="{7D4A93D8-76C0-4611-8A91-CBF932179D82}"/>
+                <a16:creationId xmlns:a16="http://schemas.microsoft.com/office/drawing/2014/main" id="{01C35895-7DC2-4C56-B0A8-DCB3A8701066}"/>
               </a:ext>
             </a:extLst>
           </p:cNvPr>
@@ -4854,7 +4854,7 @@
           <p:cNvPr id="12" name="">
             <a:extLst xmlns:a="http://schemas.openxmlformats.org/drawingml/2006/main">
               <a:ext uri="{FF2B5EF4-FFF2-40B4-BE49-F238E27FC236}">
-                <a16:creationId xmlns:a16="http://schemas.microsoft.com/office/drawing/2014/main" id="{EAA6589C-4D81-4AFA-A822-75BD527A9C2E}"/>
+                <a16:creationId xmlns:a16="http://schemas.microsoft.com/office/drawing/2014/main" id="{4F8D8566-726F-466B-8B84-6880CF5BC69E}"/>
               </a:ext>
             </a:extLst>
           </p:cNvPr>
@@ -4911,7 +4911,7 @@
           <p:cNvPr id="13" name="">
             <a:extLst xmlns:a="http://schemas.openxmlformats.org/drawingml/2006/main">
               <a:ext uri="{FF2B5EF4-FFF2-40B4-BE49-F238E27FC236}">
-                <a16:creationId xmlns:a16="http://schemas.microsoft.com/office/drawing/2014/main" id="{5DC463A7-D94E-4AE8-A291-7C379FB6F34F}"/>
+                <a16:creationId xmlns:a16="http://schemas.microsoft.com/office/drawing/2014/main" id="{315DE378-FAE4-46DC-80EB-E8A24E995B19}"/>
               </a:ext>
             </a:extLst>
           </p:cNvPr>
@@ -4968,7 +4968,7 @@
           <p:cNvPr id="14" name="">
             <a:extLst xmlns:a="http://schemas.openxmlformats.org/drawingml/2006/main">
               <a:ext uri="{FF2B5EF4-FFF2-40B4-BE49-F238E27FC236}">
-                <a16:creationId xmlns:a16="http://schemas.microsoft.com/office/drawing/2014/main" id="{CDFD82E4-0DB9-4F37-992B-BB365BF05D59}"/>
+                <a16:creationId xmlns:a16="http://schemas.microsoft.com/office/drawing/2014/main" id="{5C2A24B1-F156-432F-BE85-3315AF9D64D0}"/>
               </a:ext>
             </a:extLst>
           </p:cNvPr>
@@ -5002,7 +5002,7 @@
           <p:cNvPr id="15" name="">
             <a:extLst xmlns:a="http://schemas.openxmlformats.org/drawingml/2006/main">
               <a:ext uri="{FF2B5EF4-FFF2-40B4-BE49-F238E27FC236}">
-                <a16:creationId xmlns:a16="http://schemas.microsoft.com/office/drawing/2014/main" id="{E45D30C7-6203-4099-8DD6-C6F5D07A6AAD}"/>
+                <a16:creationId xmlns:a16="http://schemas.microsoft.com/office/drawing/2014/main" id="{9FC4BF65-FAB7-4D95-8CEE-7FC3723A2F3D}"/>
               </a:ext>
             </a:extLst>
           </p:cNvPr>
@@ -5034,7 +5034,7 @@
           <p:cNvPr id="16" name="">
             <a:extLst xmlns:a="http://schemas.openxmlformats.org/drawingml/2006/main">
               <a:ext uri="{FF2B5EF4-FFF2-40B4-BE49-F238E27FC236}">
-                <a16:creationId xmlns:a16="http://schemas.microsoft.com/office/drawing/2014/main" id="{91B4BC56-DF61-49AB-B510-75A2659F572B}"/>
+                <a16:creationId xmlns:a16="http://schemas.microsoft.com/office/drawing/2014/main" id="{DD599AC7-4873-4316-985D-1FA1EAF80344}"/>
               </a:ext>
             </a:extLst>
           </p:cNvPr>
@@ -5091,7 +5091,7 @@
           <p:cNvPr id="17" name="">
             <a:extLst xmlns:a="http://schemas.openxmlformats.org/drawingml/2006/main">
               <a:ext uri="{FF2B5EF4-FFF2-40B4-BE49-F238E27FC236}">
-                <a16:creationId xmlns:a16="http://schemas.microsoft.com/office/drawing/2014/main" id="{ADFF710A-1201-412A-AF15-43177D3BDBC6}"/>
+                <a16:creationId xmlns:a16="http://schemas.microsoft.com/office/drawing/2014/main" id="{77C3FFFC-63E6-4C29-9679-D31BE5AE504C}"/>
               </a:ext>
             </a:extLst>
           </p:cNvPr>
@@ -5148,7 +5148,7 @@
           <p:cNvPr id="18" name="">
             <a:extLst xmlns:a="http://schemas.openxmlformats.org/drawingml/2006/main">
               <a:ext uri="{FF2B5EF4-FFF2-40B4-BE49-F238E27FC236}">
-                <a16:creationId xmlns:a16="http://schemas.microsoft.com/office/drawing/2014/main" id="{ABBFFEDA-E28D-4E4C-B852-AC55A9BD6281}"/>
+                <a16:creationId xmlns:a16="http://schemas.microsoft.com/office/drawing/2014/main" id="{77DB69AE-0510-4411-BE19-2651D4296F84}"/>
               </a:ext>
             </a:extLst>
           </p:cNvPr>
@@ -5182,7 +5182,7 @@
           <p:cNvPr id="19" name="">
             <a:extLst xmlns:a="http://schemas.openxmlformats.org/drawingml/2006/main">
               <a:ext uri="{FF2B5EF4-FFF2-40B4-BE49-F238E27FC236}">
-                <a16:creationId xmlns:a16="http://schemas.microsoft.com/office/drawing/2014/main" id="{6D6DEFF8-D04C-4533-A777-C452B7BCCEF1}"/>
+                <a16:creationId xmlns:a16="http://schemas.microsoft.com/office/drawing/2014/main" id="{913E6A4F-9858-42D6-B732-48031C577F3B}"/>
               </a:ext>
             </a:extLst>
           </p:cNvPr>
@@ -5214,7 +5214,7 @@
           <p:cNvPr id="20" name="">
             <a:extLst xmlns:a="http://schemas.openxmlformats.org/drawingml/2006/main">
               <a:ext uri="{FF2B5EF4-FFF2-40B4-BE49-F238E27FC236}">
-                <a16:creationId xmlns:a16="http://schemas.microsoft.com/office/drawing/2014/main" id="{DEC12126-0C5B-4A51-AE27-5767B59F492F}"/>
+                <a16:creationId xmlns:a16="http://schemas.microsoft.com/office/drawing/2014/main" id="{1B6AF5FC-DFE2-4980-9D9E-500EC029F187}"/>
               </a:ext>
             </a:extLst>
           </p:cNvPr>
@@ -5271,7 +5271,7 @@
           <p:cNvPr id="21" name="">
             <a:extLst xmlns:a="http://schemas.openxmlformats.org/drawingml/2006/main">
               <a:ext uri="{FF2B5EF4-FFF2-40B4-BE49-F238E27FC236}">
-                <a16:creationId xmlns:a16="http://schemas.microsoft.com/office/drawing/2014/main" id="{BB1E9BF9-A67D-4374-BD9E-72615EBE8192}"/>
+                <a16:creationId xmlns:a16="http://schemas.microsoft.com/office/drawing/2014/main" id="{EEBC10F3-7554-4C2B-AAA0-88F16A6CA86B}"/>
               </a:ext>
             </a:extLst>
           </p:cNvPr>
@@ -5328,7 +5328,7 @@
           <p:cNvPr id="22" name="">
             <a:extLst xmlns:a="http://schemas.openxmlformats.org/drawingml/2006/main">
               <a:ext uri="{FF2B5EF4-FFF2-40B4-BE49-F238E27FC236}">
-                <a16:creationId xmlns:a16="http://schemas.microsoft.com/office/drawing/2014/main" id="{3A6C5502-9938-4187-946B-E08FA14ADF0B}"/>
+                <a16:creationId xmlns:a16="http://schemas.microsoft.com/office/drawing/2014/main" id="{180FFB46-29A7-4263-AD2E-91143F643159}"/>
               </a:ext>
             </a:extLst>
           </p:cNvPr>
@@ -5383,7 +5383,7 @@
     </p:spTree>
     <p:extLst>
       <p:ext uri="{BB962C8B-B14F-4D97-AF65-F5344CB8AC3E}">
-        <p14:creationId xmlns:p14="http://schemas.microsoft.com/office/powerpoint/2010/main" val="626598007"/>
+        <p14:creationId xmlns:p14="http://schemas.microsoft.com/office/powerpoint/2010/main" val="305253783"/>
       </p:ext>
     </p:extLst>
   </p:cSld>
@@ -5584,7 +5584,7 @@
           <p:cNvPr id="23" name="">
             <a:extLst xmlns:a="http://schemas.openxmlformats.org/drawingml/2006/main">
               <a:ext uri="{FF2B5EF4-FFF2-40B4-BE49-F238E27FC236}">
-                <a16:creationId xmlns:a16="http://schemas.microsoft.com/office/drawing/2014/main" id="{4E9DB739-4F87-4D13-8049-1879C54A3341}"/>
+                <a16:creationId xmlns:a16="http://schemas.microsoft.com/office/drawing/2014/main" id="{CE3B35C6-F942-4453-8610-34C5C73D8BB3}"/>
               </a:ext>
             </a:extLst>
           </p:cNvPr>
@@ -5616,7 +5616,7 @@
           <p:cNvPr id="2" name="">
             <a:extLst xmlns:a="http://schemas.openxmlformats.org/drawingml/2006/main">
               <a:ext uri="{FF2B5EF4-FFF2-40B4-BE49-F238E27FC236}">
-                <a16:creationId xmlns:a16="http://schemas.microsoft.com/office/drawing/2014/main" id="{40AB1DFE-9CA9-4866-8A8E-C6711D5CFFF9}"/>
+                <a16:creationId xmlns:a16="http://schemas.microsoft.com/office/drawing/2014/main" id="{C688BEC6-3CFC-44EF-B1D6-58A8C042EF86}"/>
               </a:ext>
             </a:extLst>
           </p:cNvPr>
@@ -5673,7 +5673,7 @@
           <p:cNvPr id="3" name="">
             <a:extLst xmlns:a="http://schemas.openxmlformats.org/drawingml/2006/main">
               <a:ext uri="{FF2B5EF4-FFF2-40B4-BE49-F238E27FC236}">
-                <a16:creationId xmlns:a16="http://schemas.microsoft.com/office/drawing/2014/main" id="{33C9A11B-2438-4B90-924C-D2AC28E3B268}"/>
+                <a16:creationId xmlns:a16="http://schemas.microsoft.com/office/drawing/2014/main" id="{81639348-DE36-4D61-84E9-7560E511AB5E}"/>
               </a:ext>
             </a:extLst>
           </p:cNvPr>
@@ -5705,7 +5705,7 @@
           <p:cNvPr id="4" name="">
             <a:extLst xmlns:a="http://schemas.openxmlformats.org/drawingml/2006/main">
               <a:ext uri="{FF2B5EF4-FFF2-40B4-BE49-F238E27FC236}">
-                <a16:creationId xmlns:a16="http://schemas.microsoft.com/office/drawing/2014/main" id="{FD024A25-D049-41A6-93D8-77929D183FD6}"/>
+                <a16:creationId xmlns:a16="http://schemas.microsoft.com/office/drawing/2014/main" id="{3EAAAB27-E02B-4308-8DEA-EB793D13DC24}"/>
               </a:ext>
             </a:extLst>
           </p:cNvPr>
@@ -5762,7 +5762,7 @@
           <p:cNvPr id="5" name="">
             <a:extLst xmlns:a="http://schemas.openxmlformats.org/drawingml/2006/main">
               <a:ext uri="{FF2B5EF4-FFF2-40B4-BE49-F238E27FC236}">
-                <a16:creationId xmlns:a16="http://schemas.microsoft.com/office/drawing/2014/main" id="{5EFC7D87-219C-41E4-9022-211CA56AC72F}"/>
+                <a16:creationId xmlns:a16="http://schemas.microsoft.com/office/drawing/2014/main" id="{7372337A-7200-4C9B-8573-8CB5ACDF7F2D}"/>
               </a:ext>
             </a:extLst>
           </p:cNvPr>
@@ -5819,7 +5819,7 @@
           <p:cNvPr id="6" name="">
             <a:extLst xmlns:a="http://schemas.openxmlformats.org/drawingml/2006/main">
               <a:ext uri="{FF2B5EF4-FFF2-40B4-BE49-F238E27FC236}">
-                <a16:creationId xmlns:a16="http://schemas.microsoft.com/office/drawing/2014/main" id="{03569855-B5C7-469F-A2BE-77E955DADA3E}"/>
+                <a16:creationId xmlns:a16="http://schemas.microsoft.com/office/drawing/2014/main" id="{55AD284A-028D-4D50-85AE-406578D83EE2}"/>
               </a:ext>
             </a:extLst>
           </p:cNvPr>
@@ -5876,7 +5876,7 @@
           <p:cNvPr id="7" name="">
             <a:extLst xmlns:a="http://schemas.openxmlformats.org/drawingml/2006/main">
               <a:ext uri="{FF2B5EF4-FFF2-40B4-BE49-F238E27FC236}">
-                <a16:creationId xmlns:a16="http://schemas.microsoft.com/office/drawing/2014/main" id="{A279294B-2413-44F7-9A92-E0C1A5EB370F}"/>
+                <a16:creationId xmlns:a16="http://schemas.microsoft.com/office/drawing/2014/main" id="{43687BA0-31CA-4EA8-89D9-F55B3C491BC4}"/>
               </a:ext>
             </a:extLst>
           </p:cNvPr>
@@ -5908,7 +5908,7 @@
           <p:cNvPr id="8" name="">
             <a:extLst xmlns:a="http://schemas.openxmlformats.org/drawingml/2006/main">
               <a:ext uri="{FF2B5EF4-FFF2-40B4-BE49-F238E27FC236}">
-                <a16:creationId xmlns:a16="http://schemas.microsoft.com/office/drawing/2014/main" id="{6A3B0CE2-A670-4112-8F0C-F3C3E28DD47E}"/>
+                <a16:creationId xmlns:a16="http://schemas.microsoft.com/office/drawing/2014/main" id="{6C8D866B-31F8-423E-A972-B3635E8399D4}"/>
               </a:ext>
             </a:extLst>
           </p:cNvPr>
@@ -5965,7 +5965,7 @@
           <p:cNvPr id="9" name="">
             <a:extLst xmlns:a="http://schemas.openxmlformats.org/drawingml/2006/main">
               <a:ext uri="{FF2B5EF4-FFF2-40B4-BE49-F238E27FC236}">
-                <a16:creationId xmlns:a16="http://schemas.microsoft.com/office/drawing/2014/main" id="{53AA5455-0D76-4C49-A384-F172F2662DA0}"/>
+                <a16:creationId xmlns:a16="http://schemas.microsoft.com/office/drawing/2014/main" id="{A88AAECD-83CF-4663-80B0-0F2F15FFD91D}"/>
               </a:ext>
             </a:extLst>
           </p:cNvPr>
@@ -6022,7 +6022,7 @@
           <p:cNvPr id="10" name="">
             <a:extLst xmlns:a="http://schemas.openxmlformats.org/drawingml/2006/main">
               <a:ext uri="{FF2B5EF4-FFF2-40B4-BE49-F238E27FC236}">
-                <a16:creationId xmlns:a16="http://schemas.microsoft.com/office/drawing/2014/main" id="{CC28E1FD-710C-49E8-BA65-27925BB10816}"/>
+                <a16:creationId xmlns:a16="http://schemas.microsoft.com/office/drawing/2014/main" id="{FF01E05E-218D-4464-8F01-E75181EDD054}"/>
               </a:ext>
             </a:extLst>
           </p:cNvPr>
@@ -6056,7 +6056,7 @@
           <p:cNvPr id="11" name="">
             <a:extLst xmlns:a="http://schemas.openxmlformats.org/drawingml/2006/main">
               <a:ext uri="{FF2B5EF4-FFF2-40B4-BE49-F238E27FC236}">
-                <a16:creationId xmlns:a16="http://schemas.microsoft.com/office/drawing/2014/main" id="{9D6B891A-9BC3-4772-BADC-27EDC52BF84C}"/>
+                <a16:creationId xmlns:a16="http://schemas.microsoft.com/office/drawing/2014/main" id="{1C87F040-B1AE-494D-A735-97D3B556486D}"/>
               </a:ext>
             </a:extLst>
           </p:cNvPr>
@@ -6088,7 +6088,7 @@
           <p:cNvPr id="12" name="">
             <a:extLst xmlns:a="http://schemas.openxmlformats.org/drawingml/2006/main">
               <a:ext uri="{FF2B5EF4-FFF2-40B4-BE49-F238E27FC236}">
-                <a16:creationId xmlns:a16="http://schemas.microsoft.com/office/drawing/2014/main" id="{B1CA5F7C-63B6-43DE-975E-BC36050BCE79}"/>
+                <a16:creationId xmlns:a16="http://schemas.microsoft.com/office/drawing/2014/main" id="{82033601-6F94-4156-9833-6FEC6AFA2608}"/>
               </a:ext>
             </a:extLst>
           </p:cNvPr>
@@ -6145,7 +6145,7 @@
           <p:cNvPr id="13" name="">
             <a:extLst xmlns:a="http://schemas.openxmlformats.org/drawingml/2006/main">
               <a:ext uri="{FF2B5EF4-FFF2-40B4-BE49-F238E27FC236}">
-                <a16:creationId xmlns:a16="http://schemas.microsoft.com/office/drawing/2014/main" id="{FAB71AFA-7663-4434-8B90-4D9A326BC737}"/>
+                <a16:creationId xmlns:a16="http://schemas.microsoft.com/office/drawing/2014/main" id="{260004E5-DC26-494C-A5B2-6FA99885C57B}"/>
               </a:ext>
             </a:extLst>
           </p:cNvPr>
@@ -6202,7 +6202,7 @@
           <p:cNvPr id="14" name="">
             <a:extLst xmlns:a="http://schemas.openxmlformats.org/drawingml/2006/main">
               <a:ext uri="{FF2B5EF4-FFF2-40B4-BE49-F238E27FC236}">
-                <a16:creationId xmlns:a16="http://schemas.microsoft.com/office/drawing/2014/main" id="{4E4E5641-1FA6-4C68-9094-480B7A1ACCD1}"/>
+                <a16:creationId xmlns:a16="http://schemas.microsoft.com/office/drawing/2014/main" id="{D6BB0E4B-BB9E-4C46-84FE-8CF09A7F30C4}"/>
               </a:ext>
             </a:extLst>
           </p:cNvPr>
@@ -6236,7 +6236,7 @@
           <p:cNvPr id="15" name="">
             <a:extLst xmlns:a="http://schemas.openxmlformats.org/drawingml/2006/main">
               <a:ext uri="{FF2B5EF4-FFF2-40B4-BE49-F238E27FC236}">
-                <a16:creationId xmlns:a16="http://schemas.microsoft.com/office/drawing/2014/main" id="{21CAFF88-190D-4CFC-B342-7CB387EBAEB6}"/>
+                <a16:creationId xmlns:a16="http://schemas.microsoft.com/office/drawing/2014/main" id="{737B2DDB-F579-4ACA-B2A0-B59D7AFA296F}"/>
               </a:ext>
             </a:extLst>
           </p:cNvPr>
@@ -6268,7 +6268,7 @@
           <p:cNvPr id="16" name="">
             <a:extLst xmlns:a="http://schemas.openxmlformats.org/drawingml/2006/main">
               <a:ext uri="{FF2B5EF4-FFF2-40B4-BE49-F238E27FC236}">
-                <a16:creationId xmlns:a16="http://schemas.microsoft.com/office/drawing/2014/main" id="{CF9D7B0B-1D8D-40FD-9135-F4C7B0F08896}"/>
+                <a16:creationId xmlns:a16="http://schemas.microsoft.com/office/drawing/2014/main" id="{A0125598-2F46-4862-9ACA-6E0A615050F5}"/>
               </a:ext>
             </a:extLst>
           </p:cNvPr>
@@ -6325,7 +6325,7 @@
           <p:cNvPr id="17" name="">
             <a:extLst xmlns:a="http://schemas.openxmlformats.org/drawingml/2006/main">
               <a:ext uri="{FF2B5EF4-FFF2-40B4-BE49-F238E27FC236}">
-                <a16:creationId xmlns:a16="http://schemas.microsoft.com/office/drawing/2014/main" id="{AD628B02-116A-4ACF-B27C-A3994BD4F43F}"/>
+                <a16:creationId xmlns:a16="http://schemas.microsoft.com/office/drawing/2014/main" id="{D67527D1-7DCA-4D19-8404-D6CA7961133E}"/>
               </a:ext>
             </a:extLst>
           </p:cNvPr>
@@ -6382,7 +6382,7 @@
           <p:cNvPr id="18" name="">
             <a:extLst xmlns:a="http://schemas.openxmlformats.org/drawingml/2006/main">
               <a:ext uri="{FF2B5EF4-FFF2-40B4-BE49-F238E27FC236}">
-                <a16:creationId xmlns:a16="http://schemas.microsoft.com/office/drawing/2014/main" id="{528BF424-A3C4-4708-8B72-9927278924F3}"/>
+                <a16:creationId xmlns:a16="http://schemas.microsoft.com/office/drawing/2014/main" id="{02106212-96BD-43D9-9BEA-61470171935E}"/>
               </a:ext>
             </a:extLst>
           </p:cNvPr>
@@ -6416,7 +6416,7 @@
           <p:cNvPr id="19" name="">
             <a:extLst xmlns:a="http://schemas.openxmlformats.org/drawingml/2006/main">
               <a:ext uri="{FF2B5EF4-FFF2-40B4-BE49-F238E27FC236}">
-                <a16:creationId xmlns:a16="http://schemas.microsoft.com/office/drawing/2014/main" id="{E1224979-E847-4AB2-82DC-E0359D2C191E}"/>
+                <a16:creationId xmlns:a16="http://schemas.microsoft.com/office/drawing/2014/main" id="{DCD798F6-FE9B-4DEF-B349-4D67C4C9EACD}"/>
               </a:ext>
             </a:extLst>
           </p:cNvPr>
@@ -6448,7 +6448,7 @@
           <p:cNvPr id="20" name="">
             <a:extLst xmlns:a="http://schemas.openxmlformats.org/drawingml/2006/main">
               <a:ext uri="{FF2B5EF4-FFF2-40B4-BE49-F238E27FC236}">
-                <a16:creationId xmlns:a16="http://schemas.microsoft.com/office/drawing/2014/main" id="{75C9635B-6C80-4DC2-888E-3A817258F992}"/>
+                <a16:creationId xmlns:a16="http://schemas.microsoft.com/office/drawing/2014/main" id="{53B04E1D-1F52-44F7-9134-D61BEC463601}"/>
               </a:ext>
             </a:extLst>
           </p:cNvPr>
@@ -6505,7 +6505,7 @@
           <p:cNvPr id="21" name="">
             <a:extLst xmlns:a="http://schemas.openxmlformats.org/drawingml/2006/main">
               <a:ext uri="{FF2B5EF4-FFF2-40B4-BE49-F238E27FC236}">
-                <a16:creationId xmlns:a16="http://schemas.microsoft.com/office/drawing/2014/main" id="{DDAC3427-F108-48C8-8F76-3AB5F2FFEB63}"/>
+                <a16:creationId xmlns:a16="http://schemas.microsoft.com/office/drawing/2014/main" id="{47C0B3EC-9663-4AC6-A54C-41509C4C8755}"/>
               </a:ext>
             </a:extLst>
           </p:cNvPr>
@@ -6562,7 +6562,7 @@
           <p:cNvPr id="22" name="">
             <a:extLst xmlns:a="http://schemas.openxmlformats.org/drawingml/2006/main">
               <a:ext uri="{FF2B5EF4-FFF2-40B4-BE49-F238E27FC236}">
-                <a16:creationId xmlns:a16="http://schemas.microsoft.com/office/drawing/2014/main" id="{14C77D91-E9EE-4406-BB4B-95D7737B87D7}"/>
+                <a16:creationId xmlns:a16="http://schemas.microsoft.com/office/drawing/2014/main" id="{AEBE6515-CEAB-4701-8E89-44E07A8D4EA5}"/>
               </a:ext>
             </a:extLst>
           </p:cNvPr>
@@ -6617,7 +6617,7 @@
     </p:spTree>
     <p:extLst>
       <p:ext uri="{BB962C8B-B14F-4D97-AF65-F5344CB8AC3E}">
-        <p14:creationId xmlns:p14="http://schemas.microsoft.com/office/powerpoint/2010/main" val="1772274213"/>
+        <p14:creationId xmlns:p14="http://schemas.microsoft.com/office/powerpoint/2010/main" val="414678267"/>
       </p:ext>
     </p:extLst>
   </p:cSld>
@@ -6818,7 +6818,7 @@
           <p:cNvPr id="16" name="">
             <a:extLst xmlns:a="http://schemas.openxmlformats.org/drawingml/2006/main">
               <a:ext uri="{FF2B5EF4-FFF2-40B4-BE49-F238E27FC236}">
-                <a16:creationId xmlns:a16="http://schemas.microsoft.com/office/drawing/2014/main" id="{DBE10F9A-A5BE-4B57-B1D8-079B07A0605B}"/>
+                <a16:creationId xmlns:a16="http://schemas.microsoft.com/office/drawing/2014/main" id="{4D3A1DC6-84BA-4A44-9976-041CB3402946}"/>
               </a:ext>
             </a:extLst>
           </p:cNvPr>
@@ -6850,7 +6850,7 @@
           <p:cNvPr id="2" name="">
             <a:extLst xmlns:a="http://schemas.openxmlformats.org/drawingml/2006/main">
               <a:ext uri="{FF2B5EF4-FFF2-40B4-BE49-F238E27FC236}">
-                <a16:creationId xmlns:a16="http://schemas.microsoft.com/office/drawing/2014/main" id="{7163C5D8-0F9B-4267-B49E-108CFF029DB2}"/>
+                <a16:creationId xmlns:a16="http://schemas.microsoft.com/office/drawing/2014/main" id="{EF09CB76-2C01-4110-8A09-04A7F3FBD3AE}"/>
               </a:ext>
             </a:extLst>
           </p:cNvPr>
@@ -6907,7 +6907,7 @@
           <p:cNvPr id="3" name="">
             <a:extLst xmlns:a="http://schemas.openxmlformats.org/drawingml/2006/main">
               <a:ext uri="{FF2B5EF4-FFF2-40B4-BE49-F238E27FC236}">
-                <a16:creationId xmlns:a16="http://schemas.microsoft.com/office/drawing/2014/main" id="{2998D7F3-5D6D-41F7-A9A2-FA2C935E28C0}"/>
+                <a16:creationId xmlns:a16="http://schemas.microsoft.com/office/drawing/2014/main" id="{BB825246-DE34-4B5C-87A6-CAA738B35B77}"/>
               </a:ext>
             </a:extLst>
           </p:cNvPr>
@@ -6939,7 +6939,7 @@
           <p:cNvPr id="4" name="">
             <a:extLst xmlns:a="http://schemas.openxmlformats.org/drawingml/2006/main">
               <a:ext uri="{FF2B5EF4-FFF2-40B4-BE49-F238E27FC236}">
-                <a16:creationId xmlns:a16="http://schemas.microsoft.com/office/drawing/2014/main" id="{EE03F1D9-D7A4-479F-A2F9-8A905EC9D039}"/>
+                <a16:creationId xmlns:a16="http://schemas.microsoft.com/office/drawing/2014/main" id="{33C7AED2-6112-4F1A-A714-A283C946B599}"/>
               </a:ext>
             </a:extLst>
           </p:cNvPr>
@@ -6996,7 +6996,7 @@
           <p:cNvPr id="5" name="">
             <a:extLst xmlns:a="http://schemas.openxmlformats.org/drawingml/2006/main">
               <a:ext uri="{FF2B5EF4-FFF2-40B4-BE49-F238E27FC236}">
-                <a16:creationId xmlns:a16="http://schemas.microsoft.com/office/drawing/2014/main" id="{22F215B8-8F6A-4B8A-AFCA-D532A9EA1B18}"/>
+                <a16:creationId xmlns:a16="http://schemas.microsoft.com/office/drawing/2014/main" id="{8672E1D4-EE44-4F36-A767-1A245F64EF44}"/>
               </a:ext>
             </a:extLst>
           </p:cNvPr>
@@ -7053,7 +7053,7 @@
           <p:cNvPr id="6" name="">
             <a:extLst xmlns:a="http://schemas.openxmlformats.org/drawingml/2006/main">
               <a:ext uri="{FF2B5EF4-FFF2-40B4-BE49-F238E27FC236}">
-                <a16:creationId xmlns:a16="http://schemas.microsoft.com/office/drawing/2014/main" id="{22D6D9C4-F5CE-4F92-ADE9-9D3562675E2D}"/>
+                <a16:creationId xmlns:a16="http://schemas.microsoft.com/office/drawing/2014/main" id="{F22EDFC9-B42C-4913-8DBD-C5FE7DCED32F}"/>
               </a:ext>
             </a:extLst>
           </p:cNvPr>
@@ -7110,7 +7110,7 @@
           <p:cNvPr id="7" name="">
             <a:extLst xmlns:a="http://schemas.openxmlformats.org/drawingml/2006/main">
               <a:ext uri="{FF2B5EF4-FFF2-40B4-BE49-F238E27FC236}">
-                <a16:creationId xmlns:a16="http://schemas.microsoft.com/office/drawing/2014/main" id="{571DF0AC-A6B9-48F6-9799-DC390479BD75}"/>
+                <a16:creationId xmlns:a16="http://schemas.microsoft.com/office/drawing/2014/main" id="{09B792AD-2CB3-45B8-AC70-8C548D710551}"/>
               </a:ext>
             </a:extLst>
           </p:cNvPr>
@@ -7142,7 +7142,7 @@
           <p:cNvPr id="8" name="">
             <a:extLst xmlns:a="http://schemas.openxmlformats.org/drawingml/2006/main">
               <a:ext uri="{FF2B5EF4-FFF2-40B4-BE49-F238E27FC236}">
-                <a16:creationId xmlns:a16="http://schemas.microsoft.com/office/drawing/2014/main" id="{7056B5AD-6B54-43B5-BDC0-E6CA2A3D1B3F}"/>
+                <a16:creationId xmlns:a16="http://schemas.microsoft.com/office/drawing/2014/main" id="{D8D67A46-557D-41C6-8A77-D8EF29D92F86}"/>
               </a:ext>
             </a:extLst>
           </p:cNvPr>
@@ -7199,7 +7199,7 @@
           <p:cNvPr id="9" name="">
             <a:extLst xmlns:a="http://schemas.openxmlformats.org/drawingml/2006/main">
               <a:ext uri="{FF2B5EF4-FFF2-40B4-BE49-F238E27FC236}">
-                <a16:creationId xmlns:a16="http://schemas.microsoft.com/office/drawing/2014/main" id="{67D5CDBB-695B-462F-88BB-D80A24EABD86}"/>
+                <a16:creationId xmlns:a16="http://schemas.microsoft.com/office/drawing/2014/main" id="{A27A8113-99A1-47D7-9B9F-85A620BE3050}"/>
               </a:ext>
             </a:extLst>
           </p:cNvPr>
@@ -7256,7 +7256,7 @@
           <p:cNvPr id="10" name="">
             <a:extLst xmlns:a="http://schemas.openxmlformats.org/drawingml/2006/main">
               <a:ext uri="{FF2B5EF4-FFF2-40B4-BE49-F238E27FC236}">
-                <a16:creationId xmlns:a16="http://schemas.microsoft.com/office/drawing/2014/main" id="{E7FA94E6-476F-4B9C-9326-1AE7F73D799A}"/>
+                <a16:creationId xmlns:a16="http://schemas.microsoft.com/office/drawing/2014/main" id="{8B4AC397-428B-4AD3-966A-0C6865B8ACD8}"/>
               </a:ext>
             </a:extLst>
           </p:cNvPr>
@@ -7313,7 +7313,7 @@
           <p:cNvPr id="11" name="">
             <a:extLst xmlns:a="http://schemas.openxmlformats.org/drawingml/2006/main">
               <a:ext uri="{FF2B5EF4-FFF2-40B4-BE49-F238E27FC236}">
-                <a16:creationId xmlns:a16="http://schemas.microsoft.com/office/drawing/2014/main" id="{4C3A3910-448C-47B3-8967-FA392B4406BC}"/>
+                <a16:creationId xmlns:a16="http://schemas.microsoft.com/office/drawing/2014/main" id="{76A95225-A481-4009-8461-8E58E8B4075C}"/>
               </a:ext>
             </a:extLst>
           </p:cNvPr>
@@ -7345,7 +7345,7 @@
           <p:cNvPr id="12" name="">
             <a:extLst xmlns:a="http://schemas.openxmlformats.org/drawingml/2006/main">
               <a:ext uri="{FF2B5EF4-FFF2-40B4-BE49-F238E27FC236}">
-                <a16:creationId xmlns:a16="http://schemas.microsoft.com/office/drawing/2014/main" id="{626939BD-BF95-4356-B5AC-556C67BCDC1B}"/>
+                <a16:creationId xmlns:a16="http://schemas.microsoft.com/office/drawing/2014/main" id="{3B7F3674-9FEC-4C33-8A4A-DE378FB8B7A0}"/>
               </a:ext>
             </a:extLst>
           </p:cNvPr>
@@ -7402,7 +7402,7 @@
           <p:cNvPr id="13" name="">
             <a:extLst xmlns:a="http://schemas.openxmlformats.org/drawingml/2006/main">
               <a:ext uri="{FF2B5EF4-FFF2-40B4-BE49-F238E27FC236}">
-                <a16:creationId xmlns:a16="http://schemas.microsoft.com/office/drawing/2014/main" id="{640831F1-2B2E-4A97-A8E1-3C9C882502BD}"/>
+                <a16:creationId xmlns:a16="http://schemas.microsoft.com/office/drawing/2014/main" id="{31BC01B3-572A-4917-B7E8-C2B69E3B9BF0}"/>
               </a:ext>
             </a:extLst>
           </p:cNvPr>
@@ -7459,7 +7459,7 @@
           <p:cNvPr id="14" name="">
             <a:extLst xmlns:a="http://schemas.openxmlformats.org/drawingml/2006/main">
               <a:ext uri="{FF2B5EF4-FFF2-40B4-BE49-F238E27FC236}">
-                <a16:creationId xmlns:a16="http://schemas.microsoft.com/office/drawing/2014/main" id="{190E6345-786F-48D5-A7F5-2B1062394A8C}"/>
+                <a16:creationId xmlns:a16="http://schemas.microsoft.com/office/drawing/2014/main" id="{0354C0C0-DD1B-4B17-B177-E2F86D760163}"/>
               </a:ext>
             </a:extLst>
           </p:cNvPr>
@@ -7516,7 +7516,7 @@
           <p:cNvPr id="15" name="">
             <a:extLst xmlns:a="http://schemas.openxmlformats.org/drawingml/2006/main">
               <a:ext uri="{FF2B5EF4-FFF2-40B4-BE49-F238E27FC236}">
-                <a16:creationId xmlns:a16="http://schemas.microsoft.com/office/drawing/2014/main" id="{FD528EE0-AE97-4F67-8471-397BD031268B}"/>
+                <a16:creationId xmlns:a16="http://schemas.microsoft.com/office/drawing/2014/main" id="{EE408C1D-2B1F-41E7-AB14-AE893E89B14F}"/>
               </a:ext>
             </a:extLst>
           </p:cNvPr>
@@ -7571,7 +7571,7 @@
     </p:spTree>
     <p:extLst>
       <p:ext uri="{BB962C8B-B14F-4D97-AF65-F5344CB8AC3E}">
-        <p14:creationId xmlns:p14="http://schemas.microsoft.com/office/powerpoint/2010/main" val="1059032314"/>
+        <p14:creationId xmlns:p14="http://schemas.microsoft.com/office/powerpoint/2010/main" val="343495988"/>
       </p:ext>
     </p:extLst>
   </p:cSld>
@@ -7772,7 +7772,7 @@
           <p:cNvPr id="23" name="">
             <a:extLst xmlns:a="http://schemas.openxmlformats.org/drawingml/2006/main">
               <a:ext uri="{FF2B5EF4-FFF2-40B4-BE49-F238E27FC236}">
-                <a16:creationId xmlns:a16="http://schemas.microsoft.com/office/drawing/2014/main" id="{51055A8F-CA62-41BD-8E0F-FB0DB7A648AA}"/>
+                <a16:creationId xmlns:a16="http://schemas.microsoft.com/office/drawing/2014/main" id="{8A4AC0A6-32AE-46FB-9649-AEA1677EEE1F}"/>
               </a:ext>
             </a:extLst>
           </p:cNvPr>
@@ -7804,7 +7804,7 @@
           <p:cNvPr id="2" name="">
             <a:extLst xmlns:a="http://schemas.openxmlformats.org/drawingml/2006/main">
               <a:ext uri="{FF2B5EF4-FFF2-40B4-BE49-F238E27FC236}">
-                <a16:creationId xmlns:a16="http://schemas.microsoft.com/office/drawing/2014/main" id="{02329FBC-073A-429D-881A-F0B1DCDD1515}"/>
+                <a16:creationId xmlns:a16="http://schemas.microsoft.com/office/drawing/2014/main" id="{747F09AB-CF61-4710-91D6-21B36E795496}"/>
               </a:ext>
             </a:extLst>
           </p:cNvPr>
@@ -7861,7 +7861,7 @@
           <p:cNvPr id="3" name="">
             <a:extLst xmlns:a="http://schemas.openxmlformats.org/drawingml/2006/main">
               <a:ext uri="{FF2B5EF4-FFF2-40B4-BE49-F238E27FC236}">
-                <a16:creationId xmlns:a16="http://schemas.microsoft.com/office/drawing/2014/main" id="{532560D3-7F67-4D1C-9327-FCEAC38A8062}"/>
+                <a16:creationId xmlns:a16="http://schemas.microsoft.com/office/drawing/2014/main" id="{A489E1E3-FCE6-4F39-BF66-C39D778FBD9C}"/>
               </a:ext>
             </a:extLst>
           </p:cNvPr>
@@ -7893,7 +7893,7 @@
           <p:cNvPr id="4" name="">
             <a:extLst xmlns:a="http://schemas.openxmlformats.org/drawingml/2006/main">
               <a:ext uri="{FF2B5EF4-FFF2-40B4-BE49-F238E27FC236}">
-                <a16:creationId xmlns:a16="http://schemas.microsoft.com/office/drawing/2014/main" id="{5D4A6F19-EC26-4134-BA15-815C6F636C09}"/>
+                <a16:creationId xmlns:a16="http://schemas.microsoft.com/office/drawing/2014/main" id="{56648B89-6147-445D-B22C-8365BAC35720}"/>
               </a:ext>
             </a:extLst>
           </p:cNvPr>
@@ -7950,7 +7950,7 @@
           <p:cNvPr id="5" name="">
             <a:extLst xmlns:a="http://schemas.openxmlformats.org/drawingml/2006/main">
               <a:ext uri="{FF2B5EF4-FFF2-40B4-BE49-F238E27FC236}">
-                <a16:creationId xmlns:a16="http://schemas.microsoft.com/office/drawing/2014/main" id="{655887FA-7519-437C-9F61-514AA2A36940}"/>
+                <a16:creationId xmlns:a16="http://schemas.microsoft.com/office/drawing/2014/main" id="{D318F405-0ACC-4B94-B5D9-90F8E15F6D3B}"/>
               </a:ext>
             </a:extLst>
           </p:cNvPr>
@@ -8007,7 +8007,7 @@
           <p:cNvPr id="6" name="">
             <a:extLst xmlns:a="http://schemas.openxmlformats.org/drawingml/2006/main">
               <a:ext uri="{FF2B5EF4-FFF2-40B4-BE49-F238E27FC236}">
-                <a16:creationId xmlns:a16="http://schemas.microsoft.com/office/drawing/2014/main" id="{03FBAEA0-7C9E-4F4A-9BD1-F4CA682ECAEA}"/>
+                <a16:creationId xmlns:a16="http://schemas.microsoft.com/office/drawing/2014/main" id="{80EB4A64-3EDF-4548-9554-BA0F1F513B2E}"/>
               </a:ext>
             </a:extLst>
           </p:cNvPr>
@@ -8064,7 +8064,7 @@
           <p:cNvPr id="7" name="">
             <a:extLst xmlns:a="http://schemas.openxmlformats.org/drawingml/2006/main">
               <a:ext uri="{FF2B5EF4-FFF2-40B4-BE49-F238E27FC236}">
-                <a16:creationId xmlns:a16="http://schemas.microsoft.com/office/drawing/2014/main" id="{34CCED64-B30F-4995-9191-853546B8BED3}"/>
+                <a16:creationId xmlns:a16="http://schemas.microsoft.com/office/drawing/2014/main" id="{CB920ABB-E691-4E17-949D-5F2BEF7FCD43}"/>
               </a:ext>
             </a:extLst>
           </p:cNvPr>
@@ -8096,7 +8096,7 @@
           <p:cNvPr id="8" name="">
             <a:extLst xmlns:a="http://schemas.openxmlformats.org/drawingml/2006/main">
               <a:ext uri="{FF2B5EF4-FFF2-40B4-BE49-F238E27FC236}">
-                <a16:creationId xmlns:a16="http://schemas.microsoft.com/office/drawing/2014/main" id="{9B580C6A-C985-49B6-AC3A-CD527927E8E4}"/>
+                <a16:creationId xmlns:a16="http://schemas.microsoft.com/office/drawing/2014/main" id="{B2BEE290-CF9D-4AD3-A7CA-B8B1F315641C}"/>
               </a:ext>
             </a:extLst>
           </p:cNvPr>
@@ -8153,7 +8153,7 @@
           <p:cNvPr id="9" name="">
             <a:extLst xmlns:a="http://schemas.openxmlformats.org/drawingml/2006/main">
               <a:ext uri="{FF2B5EF4-FFF2-40B4-BE49-F238E27FC236}">
-                <a16:creationId xmlns:a16="http://schemas.microsoft.com/office/drawing/2014/main" id="{663D853D-0BFE-4BF2-8479-956E96C2E906}"/>
+                <a16:creationId xmlns:a16="http://schemas.microsoft.com/office/drawing/2014/main" id="{4EA66B4F-400D-4657-BF0E-CCC37D83F657}"/>
               </a:ext>
             </a:extLst>
           </p:cNvPr>
@@ -8210,19 +8210,19 @@
           <p:cNvPr id="10" name="">
             <a:extLst xmlns:a="http://schemas.openxmlformats.org/drawingml/2006/main">
               <a:ext uri="{FF2B5EF4-FFF2-40B4-BE49-F238E27FC236}">
-                <a16:creationId xmlns:a16="http://schemas.microsoft.com/office/drawing/2014/main" id="{E367D6EA-8779-4E90-BDC9-CD4557F87717}"/>
-              </a:ext>
-            </a:extLst>
-          </p:cNvPr>
-          <p:cNvSpPr>
-            <a:spLocks xmlns:a="http://schemas.openxmlformats.org/drawingml/2006/main" noGrp="1"/>
-          </p:cNvSpPr>
-          <p:nvPr/>
-        </p:nvSpPr>
-        <p:spPr>
-          <a:xfrm xmlns:a="http://schemas.openxmlformats.org/drawingml/2006/main">
-            <a:off x="914400" y="1257300"/>
-            <a:ext cx="10363200" cy="781050"/>
+                <a16:creationId xmlns:a16="http://schemas.microsoft.com/office/drawing/2014/main" id="{FC7AFAB0-2B70-4231-BC18-D4910DED202E}"/>
+              </a:ext>
+            </a:extLst>
+          </p:cNvPr>
+          <p:cNvSpPr>
+            <a:spLocks xmlns:a="http://schemas.openxmlformats.org/drawingml/2006/main" noGrp="1"/>
+          </p:cNvSpPr>
+          <p:nvPr/>
+        </p:nvSpPr>
+        <p:spPr>
+          <a:xfrm xmlns:a="http://schemas.openxmlformats.org/drawingml/2006/main">
+            <a:off x="857250" y="1219200"/>
+            <a:ext cx="10477500" cy="742950"/>
           </a:xfrm>
           <a:prstGeom xmlns:a="http://schemas.openxmlformats.org/drawingml/2006/main" prst="rect">
             <a:avLst/>
@@ -8239,7 +8239,7 @@
           <a:lstStyle xmlns:a="http://schemas.openxmlformats.org/drawingml/2006/main"/>
           <a:p xmlns:a="http://schemas.openxmlformats.org/drawingml/2006/main">
             <a:pPr algn="ctr">
-              <a:defRPr sz="2175" b="1">
+              <a:defRPr sz="2100" b="1">
                 <a:solidFill>
                   <a:srgbClr val="17253A"/>
                 </a:solidFill>
@@ -8249,7 +8249,7 @@
               </a:defRPr>
             </a:pPr>
             <a:r>
-              <a:rPr sz="2175" b="1">
+              <a:rPr sz="2100" b="1">
                 <a:solidFill>
                   <a:srgbClr val="17253A"/>
                 </a:solidFill>
@@ -8267,28 +8267,30 @@
           <p:cNvPr id="11" name="">
             <a:extLst xmlns:a="http://schemas.openxmlformats.org/drawingml/2006/main">
               <a:ext uri="{FF2B5EF4-FFF2-40B4-BE49-F238E27FC236}">
-                <a16:creationId xmlns:a16="http://schemas.microsoft.com/office/drawing/2014/main" id="{4FAFFCB6-1BAE-41C3-8940-CC0E4DF53CB5}"/>
-              </a:ext>
-            </a:extLst>
-          </p:cNvPr>
-          <p:cNvSpPr>
-            <a:spLocks xmlns:a="http://schemas.openxmlformats.org/drawingml/2006/main" noGrp="1"/>
-          </p:cNvSpPr>
-          <p:nvPr/>
-        </p:nvSpPr>
-        <p:spPr>
-          <a:xfrm xmlns:a="http://schemas.openxmlformats.org/drawingml/2006/main">
-            <a:off x="1000125" y="2247900"/>
-            <a:ext cx="476250" cy="476250"/>
-          </a:xfrm>
-          <a:prstGeom xmlns:a="http://schemas.openxmlformats.org/drawingml/2006/main" prst="ellipse">
+                <a16:creationId xmlns:a16="http://schemas.microsoft.com/office/drawing/2014/main" id="{BD6EB347-0088-4775-9D94-768A6D5DECDA}"/>
+              </a:ext>
+            </a:extLst>
+          </p:cNvPr>
+          <p:cNvSpPr>
+            <a:spLocks xmlns:a="http://schemas.openxmlformats.org/drawingml/2006/main" noGrp="1"/>
+          </p:cNvSpPr>
+          <p:nvPr/>
+        </p:nvSpPr>
+        <p:spPr>
+          <a:xfrm xmlns:a="http://schemas.openxmlformats.org/drawingml/2006/main">
+            <a:off x="971550" y="2124075"/>
+            <a:ext cx="38100" cy="3524250"/>
+          </a:xfrm>
+          <a:prstGeom xmlns:a="http://schemas.openxmlformats.org/drawingml/2006/main" prst="rect">
             <a:avLst/>
           </a:prstGeom>
           <a:solidFill xmlns:a="http://schemas.openxmlformats.org/drawingml/2006/main">
-            <a:srgbClr val="18324A"/>
+            <a:srgbClr val="2C6E73"/>
           </a:solidFill>
           <a:ln xmlns:a="http://schemas.openxmlformats.org/drawingml/2006/main" w="0">
-            <a:noFill/>
+            <a:solidFill>
+              <a:srgbClr val="2C6E73"/>
+            </a:solidFill>
           </a:ln>
         </p:spPr>
       </p:sp>
@@ -8297,19 +8299,19 @@
           <p:cNvPr id="12" name="">
             <a:extLst xmlns:a="http://schemas.openxmlformats.org/drawingml/2006/main">
               <a:ext uri="{FF2B5EF4-FFF2-40B4-BE49-F238E27FC236}">
-                <a16:creationId xmlns:a16="http://schemas.microsoft.com/office/drawing/2014/main" id="{BA2F8F30-F965-4FBC-8A87-07670AEDB37E}"/>
-              </a:ext>
-            </a:extLst>
-          </p:cNvPr>
-          <p:cNvSpPr>
-            <a:spLocks xmlns:a="http://schemas.openxmlformats.org/drawingml/2006/main" noGrp="1"/>
-          </p:cNvSpPr>
-          <p:nvPr/>
-        </p:nvSpPr>
-        <p:spPr>
-          <a:xfrm xmlns:a="http://schemas.openxmlformats.org/drawingml/2006/main">
-            <a:off x="1000125" y="2276475"/>
-            <a:ext cx="476250" cy="419100"/>
+                <a16:creationId xmlns:a16="http://schemas.microsoft.com/office/drawing/2014/main" id="{5B975756-E0B7-4827-B037-AFBC0825B01E}"/>
+              </a:ext>
+            </a:extLst>
+          </p:cNvPr>
+          <p:cNvSpPr>
+            <a:spLocks xmlns:a="http://schemas.openxmlformats.org/drawingml/2006/main" noGrp="1"/>
+          </p:cNvSpPr>
+          <p:nvPr/>
+        </p:nvSpPr>
+        <p:spPr>
+          <a:xfrm xmlns:a="http://schemas.openxmlformats.org/drawingml/2006/main">
+            <a:off x="1162050" y="2200275"/>
+            <a:ext cx="400050" cy="400050"/>
           </a:xfrm>
           <a:prstGeom xmlns:a="http://schemas.openxmlformats.org/drawingml/2006/main" prst="rect">
             <a:avLst/>
@@ -8326,9 +8328,9 @@
           <a:lstStyle xmlns:a="http://schemas.openxmlformats.org/drawingml/2006/main"/>
           <a:p xmlns:a="http://schemas.openxmlformats.org/drawingml/2006/main">
             <a:pPr algn="ctr">
-              <a:defRPr sz="1350" b="1">
-                <a:solidFill>
-                  <a:srgbClr val="FFFFFF"/>
+              <a:defRPr sz="1125" b="1">
+                <a:solidFill>
+                  <a:srgbClr val="2C6E73"/>
                 </a:solidFill>
                 <a:latin typeface="Arial"/>
                 <a:ea typeface="Arial"/>
@@ -8336,9 +8338,9 @@
               </a:defRPr>
             </a:pPr>
             <a:r>
-              <a:rPr sz="1350" b="1">
-                <a:solidFill>
-                  <a:srgbClr val="FFFFFF"/>
+              <a:rPr sz="1125" b="1">
+                <a:solidFill>
+                  <a:srgbClr val="2C6E73"/>
                 </a:solidFill>
                 <a:latin typeface="Arial"/>
                 <a:ea typeface="Arial"/>
@@ -8354,19 +8356,19 @@
           <p:cNvPr id="13" name="">
             <a:extLst xmlns:a="http://schemas.openxmlformats.org/drawingml/2006/main">
               <a:ext uri="{FF2B5EF4-FFF2-40B4-BE49-F238E27FC236}">
-                <a16:creationId xmlns:a16="http://schemas.microsoft.com/office/drawing/2014/main" id="{362980CB-0FF5-4DD2-8B6B-99E636AAB309}"/>
-              </a:ext>
-            </a:extLst>
-          </p:cNvPr>
-          <p:cNvSpPr>
-            <a:spLocks xmlns:a="http://schemas.openxmlformats.org/drawingml/2006/main" noGrp="1"/>
-          </p:cNvSpPr>
-          <p:nvPr/>
-        </p:nvSpPr>
-        <p:spPr>
-          <a:xfrm xmlns:a="http://schemas.openxmlformats.org/drawingml/2006/main">
-            <a:off x="1714500" y="2181225"/>
-            <a:ext cx="9429750" cy="609600"/>
+                <a16:creationId xmlns:a16="http://schemas.microsoft.com/office/drawing/2014/main" id="{B37AF3DC-5251-43BC-90AA-8DA3050433CA}"/>
+              </a:ext>
+            </a:extLst>
+          </p:cNvPr>
+          <p:cNvSpPr>
+            <a:spLocks xmlns:a="http://schemas.openxmlformats.org/drawingml/2006/main" noGrp="1"/>
+          </p:cNvSpPr>
+          <p:nvPr/>
+        </p:nvSpPr>
+        <p:spPr>
+          <a:xfrm xmlns:a="http://schemas.openxmlformats.org/drawingml/2006/main">
+            <a:off x="1714500" y="2114550"/>
+            <a:ext cx="9525000" cy="809625"/>
           </a:xfrm>
           <a:prstGeom xmlns:a="http://schemas.openxmlformats.org/drawingml/2006/main" prst="rect">
             <a:avLst/>
@@ -8383,7 +8385,7 @@
           <a:lstStyle xmlns:a="http://schemas.openxmlformats.org/drawingml/2006/main"/>
           <a:p xmlns:a="http://schemas.openxmlformats.org/drawingml/2006/main">
             <a:pPr algn="l">
-              <a:defRPr sz="1500" b="0">
+              <a:defRPr sz="1725" b="0">
                 <a:solidFill>
                   <a:srgbClr val="17253A"/>
                 </a:solidFill>
@@ -8393,7 +8395,7 @@
               </a:defRPr>
             </a:pPr>
             <a:r>
-              <a:rPr sz="1500" b="0">
+              <a:rPr sz="1725" b="0">
                 <a:solidFill>
                   <a:srgbClr val="17253A"/>
                 </a:solidFill>
@@ -8401,7 +8403,7 @@
                 <a:ea typeface="Arial"/>
                 <a:cs typeface="Arial"/>
               </a:rPr>
-              <a:t>Identify the structure: Retrieve the relevant fact, representation or formula.</a:t>
+              <a:t>756 = 12 × 7 × height</a:t>
             </a:r>
           </a:p>
         </p:txBody>
@@ -8411,28 +8413,30 @@
           <p:cNvPr id="14" name="">
             <a:extLst xmlns:a="http://schemas.openxmlformats.org/drawingml/2006/main">
               <a:ext uri="{FF2B5EF4-FFF2-40B4-BE49-F238E27FC236}">
-                <a16:creationId xmlns:a16="http://schemas.microsoft.com/office/drawing/2014/main" id="{87324BFD-9DDA-49FE-A6C2-687D05455D69}"/>
-              </a:ext>
-            </a:extLst>
-          </p:cNvPr>
-          <p:cNvSpPr>
-            <a:spLocks xmlns:a="http://schemas.openxmlformats.org/drawingml/2006/main" noGrp="1"/>
-          </p:cNvSpPr>
-          <p:nvPr/>
-        </p:nvSpPr>
-        <p:spPr>
-          <a:xfrm xmlns:a="http://schemas.openxmlformats.org/drawingml/2006/main">
-            <a:off x="1000125" y="2990850"/>
-            <a:ext cx="476250" cy="476250"/>
-          </a:xfrm>
-          <a:prstGeom xmlns:a="http://schemas.openxmlformats.org/drawingml/2006/main" prst="ellipse">
+                <a16:creationId xmlns:a16="http://schemas.microsoft.com/office/drawing/2014/main" id="{8E6A6016-8EDE-4256-BD61-86658F6AC490}"/>
+              </a:ext>
+            </a:extLst>
+          </p:cNvPr>
+          <p:cNvSpPr>
+            <a:spLocks xmlns:a="http://schemas.openxmlformats.org/drawingml/2006/main" noGrp="1"/>
+          </p:cNvSpPr>
+          <p:nvPr/>
+        </p:nvSpPr>
+        <p:spPr>
+          <a:xfrm xmlns:a="http://schemas.openxmlformats.org/drawingml/2006/main">
+            <a:off x="1714500" y="2943225"/>
+            <a:ext cx="9334500" cy="9525"/>
+          </a:xfrm>
+          <a:prstGeom xmlns:a="http://schemas.openxmlformats.org/drawingml/2006/main" prst="rect">
             <a:avLst/>
           </a:prstGeom>
           <a:solidFill xmlns:a="http://schemas.openxmlformats.org/drawingml/2006/main">
-            <a:srgbClr val="2C6E73"/>
+            <a:srgbClr val="D9E0E6"/>
           </a:solidFill>
           <a:ln xmlns:a="http://schemas.openxmlformats.org/drawingml/2006/main" w="0">
-            <a:noFill/>
+            <a:solidFill>
+              <a:srgbClr val="D9E0E6"/>
+            </a:solidFill>
           </a:ln>
         </p:spPr>
       </p:sp>
@@ -8441,19 +8445,19 @@
           <p:cNvPr id="15" name="">
             <a:extLst xmlns:a="http://schemas.openxmlformats.org/drawingml/2006/main">
               <a:ext uri="{FF2B5EF4-FFF2-40B4-BE49-F238E27FC236}">
-                <a16:creationId xmlns:a16="http://schemas.microsoft.com/office/drawing/2014/main" id="{CB2A9509-C4AA-4DAE-82D1-8FDB4941FC5F}"/>
-              </a:ext>
-            </a:extLst>
-          </p:cNvPr>
-          <p:cNvSpPr>
-            <a:spLocks xmlns:a="http://schemas.openxmlformats.org/drawingml/2006/main" noGrp="1"/>
-          </p:cNvSpPr>
-          <p:nvPr/>
-        </p:nvSpPr>
-        <p:spPr>
-          <a:xfrm xmlns:a="http://schemas.openxmlformats.org/drawingml/2006/main">
-            <a:off x="1000125" y="3019425"/>
-            <a:ext cx="476250" cy="419100"/>
+                <a16:creationId xmlns:a16="http://schemas.microsoft.com/office/drawing/2014/main" id="{3595F494-0328-4DB8-A677-387C1ED2448F}"/>
+              </a:ext>
+            </a:extLst>
+          </p:cNvPr>
+          <p:cNvSpPr>
+            <a:spLocks xmlns:a="http://schemas.openxmlformats.org/drawingml/2006/main" noGrp="1"/>
+          </p:cNvSpPr>
+          <p:nvPr/>
+        </p:nvSpPr>
+        <p:spPr>
+          <a:xfrm xmlns:a="http://schemas.openxmlformats.org/drawingml/2006/main">
+            <a:off x="1162050" y="3076575"/>
+            <a:ext cx="400050" cy="400050"/>
           </a:xfrm>
           <a:prstGeom xmlns:a="http://schemas.openxmlformats.org/drawingml/2006/main" prst="rect">
             <a:avLst/>
@@ -8470,9 +8474,9 @@
           <a:lstStyle xmlns:a="http://schemas.openxmlformats.org/drawingml/2006/main"/>
           <a:p xmlns:a="http://schemas.openxmlformats.org/drawingml/2006/main">
             <a:pPr algn="ctr">
-              <a:defRPr sz="1350" b="1">
-                <a:solidFill>
-                  <a:srgbClr val="FFFFFF"/>
+              <a:defRPr sz="1125" b="1">
+                <a:solidFill>
+                  <a:srgbClr val="2C6E73"/>
                 </a:solidFill>
                 <a:latin typeface="Arial"/>
                 <a:ea typeface="Arial"/>
@@ -8480,9 +8484,9 @@
               </a:defRPr>
             </a:pPr>
             <a:r>
-              <a:rPr sz="1350" b="1">
-                <a:solidFill>
-                  <a:srgbClr val="FFFFFF"/>
+              <a:rPr sz="1125" b="1">
+                <a:solidFill>
+                  <a:srgbClr val="2C6E73"/>
                 </a:solidFill>
                 <a:latin typeface="Arial"/>
                 <a:ea typeface="Arial"/>
@@ -8498,19 +8502,19 @@
           <p:cNvPr id="16" name="">
             <a:extLst xmlns:a="http://schemas.openxmlformats.org/drawingml/2006/main">
               <a:ext uri="{FF2B5EF4-FFF2-40B4-BE49-F238E27FC236}">
-                <a16:creationId xmlns:a16="http://schemas.microsoft.com/office/drawing/2014/main" id="{0D851A55-36CA-4C63-8FDD-27682DE5AB73}"/>
-              </a:ext>
-            </a:extLst>
-          </p:cNvPr>
-          <p:cNvSpPr>
-            <a:spLocks xmlns:a="http://schemas.openxmlformats.org/drawingml/2006/main" noGrp="1"/>
-          </p:cNvSpPr>
-          <p:nvPr/>
-        </p:nvSpPr>
-        <p:spPr>
-          <a:xfrm xmlns:a="http://schemas.openxmlformats.org/drawingml/2006/main">
-            <a:off x="1714500" y="2924175"/>
-            <a:ext cx="9429750" cy="609600"/>
+                <a16:creationId xmlns:a16="http://schemas.microsoft.com/office/drawing/2014/main" id="{8CC7BAE8-09C8-4B22-98B2-BB91F666EE7E}"/>
+              </a:ext>
+            </a:extLst>
+          </p:cNvPr>
+          <p:cNvSpPr>
+            <a:spLocks xmlns:a="http://schemas.openxmlformats.org/drawingml/2006/main" noGrp="1"/>
+          </p:cNvSpPr>
+          <p:nvPr/>
+        </p:nvSpPr>
+        <p:spPr>
+          <a:xfrm xmlns:a="http://schemas.openxmlformats.org/drawingml/2006/main">
+            <a:off x="1714500" y="2990850"/>
+            <a:ext cx="9525000" cy="809625"/>
           </a:xfrm>
           <a:prstGeom xmlns:a="http://schemas.openxmlformats.org/drawingml/2006/main" prst="rect">
             <a:avLst/>
@@ -8527,7 +8531,7 @@
           <a:lstStyle xmlns:a="http://schemas.openxmlformats.org/drawingml/2006/main"/>
           <a:p xmlns:a="http://schemas.openxmlformats.org/drawingml/2006/main">
             <a:pPr algn="l">
-              <a:defRPr sz="1500" b="0">
+              <a:defRPr sz="1725" b="0">
                 <a:solidFill>
                   <a:srgbClr val="17253A"/>
                 </a:solidFill>
@@ -8537,7 +8541,7 @@
               </a:defRPr>
             </a:pPr>
             <a:r>
-              <a:rPr sz="1500" b="0">
+              <a:rPr sz="1725" b="0">
                 <a:solidFill>
                   <a:srgbClr val="17253A"/>
                 </a:solidFill>
@@ -8545,7 +8549,7 @@
                 <a:ea typeface="Arial"/>
                 <a:cs typeface="Arial"/>
               </a:rPr>
-              <a:t>Set up the method: Show a complete method and explain the mathematical decision.</a:t>
+              <a:t>12 × 7 = 84</a:t>
             </a:r>
           </a:p>
         </p:txBody>
@@ -8555,28 +8559,30 @@
           <p:cNvPr id="17" name="">
             <a:extLst xmlns:a="http://schemas.openxmlformats.org/drawingml/2006/main">
               <a:ext uri="{FF2B5EF4-FFF2-40B4-BE49-F238E27FC236}">
-                <a16:creationId xmlns:a16="http://schemas.microsoft.com/office/drawing/2014/main" id="{26513922-A156-449A-A84B-13AACEFE5545}"/>
-              </a:ext>
-            </a:extLst>
-          </p:cNvPr>
-          <p:cNvSpPr>
-            <a:spLocks xmlns:a="http://schemas.openxmlformats.org/drawingml/2006/main" noGrp="1"/>
-          </p:cNvSpPr>
-          <p:nvPr/>
-        </p:nvSpPr>
-        <p:spPr>
-          <a:xfrm xmlns:a="http://schemas.openxmlformats.org/drawingml/2006/main">
-            <a:off x="1000125" y="3733800"/>
-            <a:ext cx="476250" cy="476250"/>
-          </a:xfrm>
-          <a:prstGeom xmlns:a="http://schemas.openxmlformats.org/drawingml/2006/main" prst="ellipse">
+                <a16:creationId xmlns:a16="http://schemas.microsoft.com/office/drawing/2014/main" id="{2D979F3A-02F3-4DEC-AA27-9330D9F6ECF2}"/>
+              </a:ext>
+            </a:extLst>
+          </p:cNvPr>
+          <p:cNvSpPr>
+            <a:spLocks xmlns:a="http://schemas.openxmlformats.org/drawingml/2006/main" noGrp="1"/>
+          </p:cNvSpPr>
+          <p:nvPr/>
+        </p:nvSpPr>
+        <p:spPr>
+          <a:xfrm xmlns:a="http://schemas.openxmlformats.org/drawingml/2006/main">
+            <a:off x="1714500" y="3819525"/>
+            <a:ext cx="9334500" cy="9525"/>
+          </a:xfrm>
+          <a:prstGeom xmlns:a="http://schemas.openxmlformats.org/drawingml/2006/main" prst="rect">
             <a:avLst/>
           </a:prstGeom>
           <a:solidFill xmlns:a="http://schemas.openxmlformats.org/drawingml/2006/main">
-            <a:srgbClr val="2C6E73"/>
+            <a:srgbClr val="D9E0E6"/>
           </a:solidFill>
           <a:ln xmlns:a="http://schemas.openxmlformats.org/drawingml/2006/main" w="0">
-            <a:noFill/>
+            <a:solidFill>
+              <a:srgbClr val="D9E0E6"/>
+            </a:solidFill>
           </a:ln>
         </p:spPr>
       </p:sp>
@@ -8585,19 +8591,19 @@
           <p:cNvPr id="18" name="">
             <a:extLst xmlns:a="http://schemas.openxmlformats.org/drawingml/2006/main">
               <a:ext uri="{FF2B5EF4-FFF2-40B4-BE49-F238E27FC236}">
-                <a16:creationId xmlns:a16="http://schemas.microsoft.com/office/drawing/2014/main" id="{113038C2-60A1-4911-91DF-D25F18433CF3}"/>
-              </a:ext>
-            </a:extLst>
-          </p:cNvPr>
-          <p:cNvSpPr>
-            <a:spLocks xmlns:a="http://schemas.openxmlformats.org/drawingml/2006/main" noGrp="1"/>
-          </p:cNvSpPr>
-          <p:nvPr/>
-        </p:nvSpPr>
-        <p:spPr>
-          <a:xfrm xmlns:a="http://schemas.openxmlformats.org/drawingml/2006/main">
-            <a:off x="1000125" y="3762375"/>
-            <a:ext cx="476250" cy="419100"/>
+                <a16:creationId xmlns:a16="http://schemas.microsoft.com/office/drawing/2014/main" id="{7ACD8982-F333-4235-945B-BA109EA603B4}"/>
+              </a:ext>
+            </a:extLst>
+          </p:cNvPr>
+          <p:cNvSpPr>
+            <a:spLocks xmlns:a="http://schemas.openxmlformats.org/drawingml/2006/main" noGrp="1"/>
+          </p:cNvSpPr>
+          <p:nvPr/>
+        </p:nvSpPr>
+        <p:spPr>
+          <a:xfrm xmlns:a="http://schemas.openxmlformats.org/drawingml/2006/main">
+            <a:off x="1162050" y="3952875"/>
+            <a:ext cx="400050" cy="400050"/>
           </a:xfrm>
           <a:prstGeom xmlns:a="http://schemas.openxmlformats.org/drawingml/2006/main" prst="rect">
             <a:avLst/>
@@ -8614,9 +8620,9 @@
           <a:lstStyle xmlns:a="http://schemas.openxmlformats.org/drawingml/2006/main"/>
           <a:p xmlns:a="http://schemas.openxmlformats.org/drawingml/2006/main">
             <a:pPr algn="ctr">
-              <a:defRPr sz="1350" b="1">
-                <a:solidFill>
-                  <a:srgbClr val="FFFFFF"/>
+              <a:defRPr sz="1125" b="1">
+                <a:solidFill>
+                  <a:srgbClr val="2C6E73"/>
                 </a:solidFill>
                 <a:latin typeface="Arial"/>
                 <a:ea typeface="Arial"/>
@@ -8624,9 +8630,9 @@
               </a:defRPr>
             </a:pPr>
             <a:r>
-              <a:rPr sz="1350" b="1">
-                <a:solidFill>
-                  <a:srgbClr val="FFFFFF"/>
+              <a:rPr sz="1125" b="1">
+                <a:solidFill>
+                  <a:srgbClr val="2C6E73"/>
                 </a:solidFill>
                 <a:latin typeface="Arial"/>
                 <a:ea typeface="Arial"/>
@@ -8642,19 +8648,19 @@
           <p:cNvPr id="19" name="">
             <a:extLst xmlns:a="http://schemas.openxmlformats.org/drawingml/2006/main">
               <a:ext uri="{FF2B5EF4-FFF2-40B4-BE49-F238E27FC236}">
-                <a16:creationId xmlns:a16="http://schemas.microsoft.com/office/drawing/2014/main" id="{0FAE0342-742F-424E-9B23-C76AC4C52D80}"/>
-              </a:ext>
-            </a:extLst>
-          </p:cNvPr>
-          <p:cNvSpPr>
-            <a:spLocks xmlns:a="http://schemas.openxmlformats.org/drawingml/2006/main" noGrp="1"/>
-          </p:cNvSpPr>
-          <p:nvPr/>
-        </p:nvSpPr>
-        <p:spPr>
-          <a:xfrm xmlns:a="http://schemas.openxmlformats.org/drawingml/2006/main">
-            <a:off x="1714500" y="3667125"/>
-            <a:ext cx="9429750" cy="609600"/>
+                <a16:creationId xmlns:a16="http://schemas.microsoft.com/office/drawing/2014/main" id="{9A5EAE38-1EE0-4161-AE03-434CCECFEE4D}"/>
+              </a:ext>
+            </a:extLst>
+          </p:cNvPr>
+          <p:cNvSpPr>
+            <a:spLocks xmlns:a="http://schemas.openxmlformats.org/drawingml/2006/main" noGrp="1"/>
+          </p:cNvSpPr>
+          <p:nvPr/>
+        </p:nvSpPr>
+        <p:spPr>
+          <a:xfrm xmlns:a="http://schemas.openxmlformats.org/drawingml/2006/main">
+            <a:off x="1714500" y="3867150"/>
+            <a:ext cx="9525000" cy="809625"/>
           </a:xfrm>
           <a:prstGeom xmlns:a="http://schemas.openxmlformats.org/drawingml/2006/main" prst="rect">
             <a:avLst/>
@@ -8671,7 +8677,7 @@
           <a:lstStyle xmlns:a="http://schemas.openxmlformats.org/drawingml/2006/main"/>
           <a:p xmlns:a="http://schemas.openxmlformats.org/drawingml/2006/main">
             <a:pPr algn="l">
-              <a:defRPr sz="1500" b="0">
+              <a:defRPr sz="1725" b="0">
                 <a:solidFill>
                   <a:srgbClr val="17253A"/>
                 </a:solidFill>
@@ -8681,7 +8687,7 @@
               </a:defRPr>
             </a:pPr>
             <a:r>
-              <a:rPr sz="1500" b="0">
+              <a:rPr sz="1725" b="0">
                 <a:solidFill>
                   <a:srgbClr val="17253A"/>
                 </a:solidFill>
@@ -8689,7 +8695,7 @@
                 <a:ea typeface="Arial"/>
                 <a:cs typeface="Arial"/>
               </a:rPr>
-              <a:t>Complete the calculation: 9 cm.</a:t>
+              <a:t>height = 756 ÷ 84</a:t>
             </a:r>
           </a:p>
         </p:txBody>
@@ -8699,28 +8705,30 @@
           <p:cNvPr id="20" name="">
             <a:extLst xmlns:a="http://schemas.openxmlformats.org/drawingml/2006/main">
               <a:ext uri="{FF2B5EF4-FFF2-40B4-BE49-F238E27FC236}">
-                <a16:creationId xmlns:a16="http://schemas.microsoft.com/office/drawing/2014/main" id="{B9CF5B11-EC39-443D-AE1F-1500B88C34CF}"/>
-              </a:ext>
-            </a:extLst>
-          </p:cNvPr>
-          <p:cNvSpPr>
-            <a:spLocks xmlns:a="http://schemas.openxmlformats.org/drawingml/2006/main" noGrp="1"/>
-          </p:cNvSpPr>
-          <p:nvPr/>
-        </p:nvSpPr>
-        <p:spPr>
-          <a:xfrm xmlns:a="http://schemas.openxmlformats.org/drawingml/2006/main">
-            <a:off x="1000125" y="4476750"/>
-            <a:ext cx="476250" cy="476250"/>
-          </a:xfrm>
-          <a:prstGeom xmlns:a="http://schemas.openxmlformats.org/drawingml/2006/main" prst="ellipse">
+                <a16:creationId xmlns:a16="http://schemas.microsoft.com/office/drawing/2014/main" id="{75EEC56D-2D7A-43AC-AA6B-E205F604F9A1}"/>
+              </a:ext>
+            </a:extLst>
+          </p:cNvPr>
+          <p:cNvSpPr>
+            <a:spLocks xmlns:a="http://schemas.openxmlformats.org/drawingml/2006/main" noGrp="1"/>
+          </p:cNvSpPr>
+          <p:nvPr/>
+        </p:nvSpPr>
+        <p:spPr>
+          <a:xfrm xmlns:a="http://schemas.openxmlformats.org/drawingml/2006/main">
+            <a:off x="1714500" y="4695825"/>
+            <a:ext cx="9334500" cy="9525"/>
+          </a:xfrm>
+          <a:prstGeom xmlns:a="http://schemas.openxmlformats.org/drawingml/2006/main" prst="rect">
             <a:avLst/>
           </a:prstGeom>
           <a:solidFill xmlns:a="http://schemas.openxmlformats.org/drawingml/2006/main">
-            <a:srgbClr val="2C6E73"/>
+            <a:srgbClr val="D9E0E6"/>
           </a:solidFill>
           <a:ln xmlns:a="http://schemas.openxmlformats.org/drawingml/2006/main" w="0">
-            <a:noFill/>
+            <a:solidFill>
+              <a:srgbClr val="D9E0E6"/>
+            </a:solidFill>
           </a:ln>
         </p:spPr>
       </p:sp>
@@ -8729,19 +8737,19 @@
           <p:cNvPr id="21" name="">
             <a:extLst xmlns:a="http://schemas.openxmlformats.org/drawingml/2006/main">
               <a:ext uri="{FF2B5EF4-FFF2-40B4-BE49-F238E27FC236}">
-                <a16:creationId xmlns:a16="http://schemas.microsoft.com/office/drawing/2014/main" id="{3D121A75-B3C4-425F-B5F1-C02E8F9F6785}"/>
-              </a:ext>
-            </a:extLst>
-          </p:cNvPr>
-          <p:cNvSpPr>
-            <a:spLocks xmlns:a="http://schemas.openxmlformats.org/drawingml/2006/main" noGrp="1"/>
-          </p:cNvSpPr>
-          <p:nvPr/>
-        </p:nvSpPr>
-        <p:spPr>
-          <a:xfrm xmlns:a="http://schemas.openxmlformats.org/drawingml/2006/main">
-            <a:off x="1000125" y="4505325"/>
-            <a:ext cx="476250" cy="419100"/>
+                <a16:creationId xmlns:a16="http://schemas.microsoft.com/office/drawing/2014/main" id="{A92C670E-21B5-4057-95AC-FB5B2526F816}"/>
+              </a:ext>
+            </a:extLst>
+          </p:cNvPr>
+          <p:cNvSpPr>
+            <a:spLocks xmlns:a="http://schemas.openxmlformats.org/drawingml/2006/main" noGrp="1"/>
+          </p:cNvSpPr>
+          <p:nvPr/>
+        </p:nvSpPr>
+        <p:spPr>
+          <a:xfrm xmlns:a="http://schemas.openxmlformats.org/drawingml/2006/main">
+            <a:off x="1162050" y="4829175"/>
+            <a:ext cx="400050" cy="400050"/>
           </a:xfrm>
           <a:prstGeom xmlns:a="http://schemas.openxmlformats.org/drawingml/2006/main" prst="rect">
             <a:avLst/>
@@ -8758,9 +8766,9 @@
           <a:lstStyle xmlns:a="http://schemas.openxmlformats.org/drawingml/2006/main"/>
           <a:p xmlns:a="http://schemas.openxmlformats.org/drawingml/2006/main">
             <a:pPr algn="ctr">
-              <a:defRPr sz="1350" b="1">
-                <a:solidFill>
-                  <a:srgbClr val="FFFFFF"/>
+              <a:defRPr sz="1125" b="1">
+                <a:solidFill>
+                  <a:srgbClr val="2F785D"/>
                 </a:solidFill>
                 <a:latin typeface="Arial"/>
                 <a:ea typeface="Arial"/>
@@ -8768,9 +8776,9 @@
               </a:defRPr>
             </a:pPr>
             <a:r>
-              <a:rPr sz="1350" b="1">
-                <a:solidFill>
-                  <a:srgbClr val="FFFFFF"/>
+              <a:rPr sz="1125" b="1">
+                <a:solidFill>
+                  <a:srgbClr val="2F785D"/>
                 </a:solidFill>
                 <a:latin typeface="Arial"/>
                 <a:ea typeface="Arial"/>
@@ -8786,19 +8794,19 @@
           <p:cNvPr id="22" name="">
             <a:extLst xmlns:a="http://schemas.openxmlformats.org/drawingml/2006/main">
               <a:ext uri="{FF2B5EF4-FFF2-40B4-BE49-F238E27FC236}">
-                <a16:creationId xmlns:a16="http://schemas.microsoft.com/office/drawing/2014/main" id="{E6AD4295-3173-4FBA-9F1C-AC087D80DB3F}"/>
-              </a:ext>
-            </a:extLst>
-          </p:cNvPr>
-          <p:cNvSpPr>
-            <a:spLocks xmlns:a="http://schemas.openxmlformats.org/drawingml/2006/main" noGrp="1"/>
-          </p:cNvSpPr>
-          <p:nvPr/>
-        </p:nvSpPr>
-        <p:spPr>
-          <a:xfrm xmlns:a="http://schemas.openxmlformats.org/drawingml/2006/main">
-            <a:off x="1714500" y="4410075"/>
-            <a:ext cx="9429750" cy="609600"/>
+                <a16:creationId xmlns:a16="http://schemas.microsoft.com/office/drawing/2014/main" id="{9F957238-C3F8-4EF7-AA34-12DB0E7356CB}"/>
+              </a:ext>
+            </a:extLst>
+          </p:cNvPr>
+          <p:cNvSpPr>
+            <a:spLocks xmlns:a="http://schemas.openxmlformats.org/drawingml/2006/main" noGrp="1"/>
+          </p:cNvSpPr>
+          <p:nvPr/>
+        </p:nvSpPr>
+        <p:spPr>
+          <a:xfrm xmlns:a="http://schemas.openxmlformats.org/drawingml/2006/main">
+            <a:off x="1714500" y="4743450"/>
+            <a:ext cx="9525000" cy="809625"/>
           </a:xfrm>
           <a:prstGeom xmlns:a="http://schemas.openxmlformats.org/drawingml/2006/main" prst="rect">
             <a:avLst/>
@@ -8815,7 +8823,7 @@
           <a:lstStyle xmlns:a="http://schemas.openxmlformats.org/drawingml/2006/main"/>
           <a:p xmlns:a="http://schemas.openxmlformats.org/drawingml/2006/main">
             <a:pPr algn="l">
-              <a:defRPr sz="1500" b="1">
+              <a:defRPr sz="1725" b="1">
                 <a:solidFill>
                   <a:srgbClr val="2F785D"/>
                 </a:solidFill>
@@ -8825,7 +8833,7 @@
               </a:defRPr>
             </a:pPr>
             <a:r>
-              <a:rPr sz="1500" b="1">
+              <a:rPr sz="1725" b="1">
                 <a:solidFill>
                   <a:srgbClr val="2F785D"/>
                 </a:solidFill>
@@ -8833,7 +8841,7 @@
                 <a:ea typeface="Arial"/>
                 <a:cs typeface="Arial"/>
               </a:rPr>
-              <a:t>Check the result: Check the result and record a precise transition target.</a:t>
+              <a:t>height = 9 cm</a:t>
             </a:r>
           </a:p>
         </p:txBody>
@@ -8841,7 +8849,7 @@
     </p:spTree>
     <p:extLst>
       <p:ext uri="{BB962C8B-B14F-4D97-AF65-F5344CB8AC3E}">
-        <p14:creationId xmlns:p14="http://schemas.microsoft.com/office/powerpoint/2010/main" val="1493512855"/>
+        <p14:creationId xmlns:p14="http://schemas.microsoft.com/office/powerpoint/2010/main" val="384998667"/>
       </p:ext>
     </p:extLst>
   </p:cSld>
@@ -9134,7 +9142,7 @@
           <p:cNvPr id="15" name="">
             <a:extLst xmlns:a="http://schemas.openxmlformats.org/drawingml/2006/main">
               <a:ext uri="{FF2B5EF4-FFF2-40B4-BE49-F238E27FC236}">
-                <a16:creationId xmlns:a16="http://schemas.microsoft.com/office/drawing/2014/main" id="{728F2338-7087-4992-906B-FD21AB89D4C8}"/>
+                <a16:creationId xmlns:a16="http://schemas.microsoft.com/office/drawing/2014/main" id="{92D5E7C5-C64D-4A33-9AF1-C06EFA76D560}"/>
               </a:ext>
             </a:extLst>
           </p:cNvPr>
@@ -9166,7 +9174,7 @@
           <p:cNvPr id="2" name="">
             <a:extLst xmlns:a="http://schemas.openxmlformats.org/drawingml/2006/main">
               <a:ext uri="{FF2B5EF4-FFF2-40B4-BE49-F238E27FC236}">
-                <a16:creationId xmlns:a16="http://schemas.microsoft.com/office/drawing/2014/main" id="{30B74753-CE72-4EB0-B9E5-92EF7CE2CB1D}"/>
+                <a16:creationId xmlns:a16="http://schemas.microsoft.com/office/drawing/2014/main" id="{F4C5910C-56EA-411E-99A7-A5C4D916301C}"/>
               </a:ext>
             </a:extLst>
           </p:cNvPr>
@@ -9223,7 +9231,7 @@
           <p:cNvPr id="3" name="">
             <a:extLst xmlns:a="http://schemas.openxmlformats.org/drawingml/2006/main">
               <a:ext uri="{FF2B5EF4-FFF2-40B4-BE49-F238E27FC236}">
-                <a16:creationId xmlns:a16="http://schemas.microsoft.com/office/drawing/2014/main" id="{99685FCC-7D9A-4200-B5EF-3546B435A24E}"/>
+                <a16:creationId xmlns:a16="http://schemas.microsoft.com/office/drawing/2014/main" id="{D41DD150-DCB0-40E3-A569-22E08D5E6EAF}"/>
               </a:ext>
             </a:extLst>
           </p:cNvPr>
@@ -9255,7 +9263,7 @@
           <p:cNvPr id="4" name="">
             <a:extLst xmlns:a="http://schemas.openxmlformats.org/drawingml/2006/main">
               <a:ext uri="{FF2B5EF4-FFF2-40B4-BE49-F238E27FC236}">
-                <a16:creationId xmlns:a16="http://schemas.microsoft.com/office/drawing/2014/main" id="{DA6C2D12-0A21-41AA-BFC4-78399EE54305}"/>
+                <a16:creationId xmlns:a16="http://schemas.microsoft.com/office/drawing/2014/main" id="{FC25C76C-3084-49DA-9C6A-EDF61E379FCD}"/>
               </a:ext>
             </a:extLst>
           </p:cNvPr>
@@ -9312,7 +9320,7 @@
           <p:cNvPr id="5" name="">
             <a:extLst xmlns:a="http://schemas.openxmlformats.org/drawingml/2006/main">
               <a:ext uri="{FF2B5EF4-FFF2-40B4-BE49-F238E27FC236}">
-                <a16:creationId xmlns:a16="http://schemas.microsoft.com/office/drawing/2014/main" id="{7AC34EAE-80A7-49F7-BD26-C1ED66AEFD59}"/>
+                <a16:creationId xmlns:a16="http://schemas.microsoft.com/office/drawing/2014/main" id="{60CA7FA2-52DA-494C-A683-A8D794A25A50}"/>
               </a:ext>
             </a:extLst>
           </p:cNvPr>
@@ -9369,7 +9377,7 @@
           <p:cNvPr id="6" name="">
             <a:extLst xmlns:a="http://schemas.openxmlformats.org/drawingml/2006/main">
               <a:ext uri="{FF2B5EF4-FFF2-40B4-BE49-F238E27FC236}">
-                <a16:creationId xmlns:a16="http://schemas.microsoft.com/office/drawing/2014/main" id="{269B1A85-132E-4147-9E0D-4146A2B32700}"/>
+                <a16:creationId xmlns:a16="http://schemas.microsoft.com/office/drawing/2014/main" id="{4AA13D26-2842-49A0-8F19-EB67CB21D564}"/>
               </a:ext>
             </a:extLst>
           </p:cNvPr>
@@ -9426,7 +9434,7 @@
           <p:cNvPr id="7" name="">
             <a:extLst xmlns:a="http://schemas.openxmlformats.org/drawingml/2006/main">
               <a:ext uri="{FF2B5EF4-FFF2-40B4-BE49-F238E27FC236}">
-                <a16:creationId xmlns:a16="http://schemas.microsoft.com/office/drawing/2014/main" id="{8BEF5E77-01EA-4698-A4D0-B2E84587EE6A}"/>
+                <a16:creationId xmlns:a16="http://schemas.microsoft.com/office/drawing/2014/main" id="{2B9022F4-C207-41B2-A5FF-422DF483FFE1}"/>
               </a:ext>
             </a:extLst>
           </p:cNvPr>
@@ -9458,7 +9466,7 @@
           <p:cNvPr id="8" name="">
             <a:extLst xmlns:a="http://schemas.openxmlformats.org/drawingml/2006/main">
               <a:ext uri="{FF2B5EF4-FFF2-40B4-BE49-F238E27FC236}">
-                <a16:creationId xmlns:a16="http://schemas.microsoft.com/office/drawing/2014/main" id="{EA5EB80D-62FC-47BF-AF75-C2BE8B139B0C}"/>
+                <a16:creationId xmlns:a16="http://schemas.microsoft.com/office/drawing/2014/main" id="{5C0555C6-CDCE-4BBD-A5C3-59D6A28E40A2}"/>
               </a:ext>
             </a:extLst>
           </p:cNvPr>
@@ -9515,7 +9523,7 @@
           <p:cNvPr id="9" name="">
             <a:extLst xmlns:a="http://schemas.openxmlformats.org/drawingml/2006/main">
               <a:ext uri="{FF2B5EF4-FFF2-40B4-BE49-F238E27FC236}">
-                <a16:creationId xmlns:a16="http://schemas.microsoft.com/office/drawing/2014/main" id="{9D9C1105-22A1-4EC9-BE0B-0A79011CCE7A}"/>
+                <a16:creationId xmlns:a16="http://schemas.microsoft.com/office/drawing/2014/main" id="{F0A80742-D8E7-4B4A-88D2-3E349D71F00D}"/>
               </a:ext>
             </a:extLst>
           </p:cNvPr>
@@ -9572,7 +9580,7 @@
           <p:cNvPr id="10" name="">
             <a:extLst xmlns:a="http://schemas.openxmlformats.org/drawingml/2006/main">
               <a:ext uri="{FF2B5EF4-FFF2-40B4-BE49-F238E27FC236}">
-                <a16:creationId xmlns:a16="http://schemas.microsoft.com/office/drawing/2014/main" id="{1EC670D6-500F-40FD-8B16-DF6727A282C9}"/>
+                <a16:creationId xmlns:a16="http://schemas.microsoft.com/office/drawing/2014/main" id="{18C058A4-CBE7-48CA-89A9-3EFA85D0B9A8}"/>
               </a:ext>
             </a:extLst>
           </p:cNvPr>
@@ -9629,7 +9637,7 @@
           <p:cNvPr id="11" name="">
             <a:extLst xmlns:a="http://schemas.openxmlformats.org/drawingml/2006/main">
               <a:ext uri="{FF2B5EF4-FFF2-40B4-BE49-F238E27FC236}">
-                <a16:creationId xmlns:a16="http://schemas.microsoft.com/office/drawing/2014/main" id="{590AC25F-4623-423E-97F7-A7491C5640EB}"/>
+                <a16:creationId xmlns:a16="http://schemas.microsoft.com/office/drawing/2014/main" id="{FFFDCEE9-45A0-4610-A0CE-98B2DB0DF104}"/>
               </a:ext>
             </a:extLst>
           </p:cNvPr>
@@ -9686,7 +9694,7 @@
           <p:cNvPr id="12" name="">
             <a:extLst xmlns:a="http://schemas.openxmlformats.org/drawingml/2006/main">
               <a:ext uri="{FF2B5EF4-FFF2-40B4-BE49-F238E27FC236}">
-                <a16:creationId xmlns:a16="http://schemas.microsoft.com/office/drawing/2014/main" id="{2787F099-E37F-4620-97C8-5CC561A293E4}"/>
+                <a16:creationId xmlns:a16="http://schemas.microsoft.com/office/drawing/2014/main" id="{BB0E16BF-D39A-4904-B15F-99BDF296BB51}"/>
               </a:ext>
             </a:extLst>
           </p:cNvPr>
@@ -9718,7 +9726,7 @@
           <p:cNvPr id="13" name="">
             <a:extLst xmlns:a="http://schemas.openxmlformats.org/drawingml/2006/main">
               <a:ext uri="{FF2B5EF4-FFF2-40B4-BE49-F238E27FC236}">
-                <a16:creationId xmlns:a16="http://schemas.microsoft.com/office/drawing/2014/main" id="{0ED745DD-64E0-4B78-A5B4-E4E11DC96203}"/>
+                <a16:creationId xmlns:a16="http://schemas.microsoft.com/office/drawing/2014/main" id="{ABC08EFF-DBD8-4B48-85ED-52C345773C74}"/>
               </a:ext>
             </a:extLst>
           </p:cNvPr>
@@ -9775,7 +9783,7 @@
           <p:cNvPr id="14" name="">
             <a:extLst xmlns:a="http://schemas.openxmlformats.org/drawingml/2006/main">
               <a:ext uri="{FF2B5EF4-FFF2-40B4-BE49-F238E27FC236}">
-                <a16:creationId xmlns:a16="http://schemas.microsoft.com/office/drawing/2014/main" id="{34D02348-576E-44AB-8160-AEE82494B174}"/>
+                <a16:creationId xmlns:a16="http://schemas.microsoft.com/office/drawing/2014/main" id="{5F8268AB-5059-4D10-8AAC-47B0B08D860B}"/>
               </a:ext>
             </a:extLst>
           </p:cNvPr>
@@ -9830,7 +9838,7 @@
     </p:spTree>
     <p:extLst>
       <p:ext uri="{BB962C8B-B14F-4D97-AF65-F5344CB8AC3E}">
-        <p14:creationId xmlns:p14="http://schemas.microsoft.com/office/powerpoint/2010/main" val="567255421"/>
+        <p14:creationId xmlns:p14="http://schemas.microsoft.com/office/powerpoint/2010/main" val="1696071545"/>
       </p:ext>
     </p:extLst>
   </p:cSld>
@@ -10031,7 +10039,7 @@
           <p:cNvPr id="16" name="">
             <a:extLst xmlns:a="http://schemas.openxmlformats.org/drawingml/2006/main">
               <a:ext uri="{FF2B5EF4-FFF2-40B4-BE49-F238E27FC236}">
-                <a16:creationId xmlns:a16="http://schemas.microsoft.com/office/drawing/2014/main" id="{CBAF9FF6-61E7-45DB-9D8F-46253ADAFBC1}"/>
+                <a16:creationId xmlns:a16="http://schemas.microsoft.com/office/drawing/2014/main" id="{80CDBBCD-8944-49B4-9E76-E1701C7C2AEC}"/>
               </a:ext>
             </a:extLst>
           </p:cNvPr>
@@ -10063,7 +10071,7 @@
           <p:cNvPr id="2" name="">
             <a:extLst xmlns:a="http://schemas.openxmlformats.org/drawingml/2006/main">
               <a:ext uri="{FF2B5EF4-FFF2-40B4-BE49-F238E27FC236}">
-                <a16:creationId xmlns:a16="http://schemas.microsoft.com/office/drawing/2014/main" id="{F04AE5AC-9A5C-4210-947D-91C7AF3BED81}"/>
+                <a16:creationId xmlns:a16="http://schemas.microsoft.com/office/drawing/2014/main" id="{B974E439-9AD6-47CF-9B59-B43DAB2E4A01}"/>
               </a:ext>
             </a:extLst>
           </p:cNvPr>
@@ -10120,7 +10128,7 @@
           <p:cNvPr id="3" name="">
             <a:extLst xmlns:a="http://schemas.openxmlformats.org/drawingml/2006/main">
               <a:ext uri="{FF2B5EF4-FFF2-40B4-BE49-F238E27FC236}">
-                <a16:creationId xmlns:a16="http://schemas.microsoft.com/office/drawing/2014/main" id="{3615D895-BEFE-40C4-986D-D2963E8E3466}"/>
+                <a16:creationId xmlns:a16="http://schemas.microsoft.com/office/drawing/2014/main" id="{7A06ED29-2940-4D30-B9CB-840D7BAC82CB}"/>
               </a:ext>
             </a:extLst>
           </p:cNvPr>
@@ -10152,7 +10160,7 @@
           <p:cNvPr id="4" name="">
             <a:extLst xmlns:a="http://schemas.openxmlformats.org/drawingml/2006/main">
               <a:ext uri="{FF2B5EF4-FFF2-40B4-BE49-F238E27FC236}">
-                <a16:creationId xmlns:a16="http://schemas.microsoft.com/office/drawing/2014/main" id="{F6BCF93F-A823-460A-BCE5-F55BCC885C22}"/>
+                <a16:creationId xmlns:a16="http://schemas.microsoft.com/office/drawing/2014/main" id="{6B7069F9-3955-41E1-AF4E-E71F59A8785C}"/>
               </a:ext>
             </a:extLst>
           </p:cNvPr>
@@ -10209,7 +10217,7 @@
           <p:cNvPr id="5" name="">
             <a:extLst xmlns:a="http://schemas.openxmlformats.org/drawingml/2006/main">
               <a:ext uri="{FF2B5EF4-FFF2-40B4-BE49-F238E27FC236}">
-                <a16:creationId xmlns:a16="http://schemas.microsoft.com/office/drawing/2014/main" id="{8CD2BF1C-6B36-46BC-AED4-495A86E93BCE}"/>
+                <a16:creationId xmlns:a16="http://schemas.microsoft.com/office/drawing/2014/main" id="{0DAFFC70-354A-42FD-BE97-9DA9801EF7D1}"/>
               </a:ext>
             </a:extLst>
           </p:cNvPr>
@@ -10266,7 +10274,7 @@
           <p:cNvPr id="6" name="">
             <a:extLst xmlns:a="http://schemas.openxmlformats.org/drawingml/2006/main">
               <a:ext uri="{FF2B5EF4-FFF2-40B4-BE49-F238E27FC236}">
-                <a16:creationId xmlns:a16="http://schemas.microsoft.com/office/drawing/2014/main" id="{3A842C5C-4251-437E-9EE1-0DE08C09328C}"/>
+                <a16:creationId xmlns:a16="http://schemas.microsoft.com/office/drawing/2014/main" id="{A9565FD9-7FA9-4B81-934F-8BE4C2E87007}"/>
               </a:ext>
             </a:extLst>
           </p:cNvPr>
@@ -10323,7 +10331,7 @@
           <p:cNvPr id="7" name="">
             <a:extLst xmlns:a="http://schemas.openxmlformats.org/drawingml/2006/main">
               <a:ext uri="{FF2B5EF4-FFF2-40B4-BE49-F238E27FC236}">
-                <a16:creationId xmlns:a16="http://schemas.microsoft.com/office/drawing/2014/main" id="{74D30930-F373-4F41-8FE0-3245BA6DAA96}"/>
+                <a16:creationId xmlns:a16="http://schemas.microsoft.com/office/drawing/2014/main" id="{1CE972EF-230C-4CBB-834F-78F63F67AB37}"/>
               </a:ext>
             </a:extLst>
           </p:cNvPr>
@@ -10355,7 +10363,7 @@
           <p:cNvPr id="8" name="">
             <a:extLst xmlns:a="http://schemas.openxmlformats.org/drawingml/2006/main">
               <a:ext uri="{FF2B5EF4-FFF2-40B4-BE49-F238E27FC236}">
-                <a16:creationId xmlns:a16="http://schemas.microsoft.com/office/drawing/2014/main" id="{169B875F-01CB-4C25-81A2-123B6EC758B0}"/>
+                <a16:creationId xmlns:a16="http://schemas.microsoft.com/office/drawing/2014/main" id="{025AA167-0A78-4ACD-9D99-AA70CE877643}"/>
               </a:ext>
             </a:extLst>
           </p:cNvPr>
@@ -10412,7 +10420,7 @@
           <p:cNvPr id="9" name="">
             <a:extLst xmlns:a="http://schemas.openxmlformats.org/drawingml/2006/main">
               <a:ext uri="{FF2B5EF4-FFF2-40B4-BE49-F238E27FC236}">
-                <a16:creationId xmlns:a16="http://schemas.microsoft.com/office/drawing/2014/main" id="{4A30F9D0-43F4-42B2-8C70-A05819BB5C24}"/>
+                <a16:creationId xmlns:a16="http://schemas.microsoft.com/office/drawing/2014/main" id="{38F20896-29B3-417A-8E2A-1BCF7CA0D8DF}"/>
               </a:ext>
             </a:extLst>
           </p:cNvPr>
@@ -10469,7 +10477,7 @@
           <p:cNvPr id="10" name="">
             <a:extLst xmlns:a="http://schemas.openxmlformats.org/drawingml/2006/main">
               <a:ext uri="{FF2B5EF4-FFF2-40B4-BE49-F238E27FC236}">
-                <a16:creationId xmlns:a16="http://schemas.microsoft.com/office/drawing/2014/main" id="{89073130-5164-4A94-AF5B-244FE224B051}"/>
+                <a16:creationId xmlns:a16="http://schemas.microsoft.com/office/drawing/2014/main" id="{36AB7473-2EBE-4D3A-BC39-6EDE2B72EBA3}"/>
               </a:ext>
             </a:extLst>
           </p:cNvPr>
@@ -10526,7 +10534,7 @@
           <p:cNvPr id="11" name="">
             <a:extLst xmlns:a="http://schemas.openxmlformats.org/drawingml/2006/main">
               <a:ext uri="{FF2B5EF4-FFF2-40B4-BE49-F238E27FC236}">
-                <a16:creationId xmlns:a16="http://schemas.microsoft.com/office/drawing/2014/main" id="{F8EAA4F4-0250-4FC3-89F9-CD8B7097809B}"/>
+                <a16:creationId xmlns:a16="http://schemas.microsoft.com/office/drawing/2014/main" id="{303AB5C5-51F3-42B4-A56C-1C4B094156E5}"/>
               </a:ext>
             </a:extLst>
           </p:cNvPr>
@@ -10583,7 +10591,7 @@
           <p:cNvPr id="12" name="">
             <a:extLst xmlns:a="http://schemas.openxmlformats.org/drawingml/2006/main">
               <a:ext uri="{FF2B5EF4-FFF2-40B4-BE49-F238E27FC236}">
-                <a16:creationId xmlns:a16="http://schemas.microsoft.com/office/drawing/2014/main" id="{091F9358-8012-4944-9679-AA890CE61DA9}"/>
+                <a16:creationId xmlns:a16="http://schemas.microsoft.com/office/drawing/2014/main" id="{0E3463F2-1575-4FA2-9CDB-0CA5130DF0AC}"/>
               </a:ext>
             </a:extLst>
           </p:cNvPr>
@@ -10640,7 +10648,7 @@
           <p:cNvPr id="13" name="">
             <a:extLst xmlns:a="http://schemas.openxmlformats.org/drawingml/2006/main">
               <a:ext uri="{FF2B5EF4-FFF2-40B4-BE49-F238E27FC236}">
-                <a16:creationId xmlns:a16="http://schemas.microsoft.com/office/drawing/2014/main" id="{75D7712D-752E-4C69-9259-14E42C842896}"/>
+                <a16:creationId xmlns:a16="http://schemas.microsoft.com/office/drawing/2014/main" id="{2A3E3051-A8E3-4D6D-B755-FD07318BEFF1}"/>
               </a:ext>
             </a:extLst>
           </p:cNvPr>
@@ -10697,7 +10705,7 @@
           <p:cNvPr id="14" name="">
             <a:extLst xmlns:a="http://schemas.openxmlformats.org/drawingml/2006/main">
               <a:ext uri="{FF2B5EF4-FFF2-40B4-BE49-F238E27FC236}">
-                <a16:creationId xmlns:a16="http://schemas.microsoft.com/office/drawing/2014/main" id="{38F2B824-DE21-4AFF-8058-709A40B46253}"/>
+                <a16:creationId xmlns:a16="http://schemas.microsoft.com/office/drawing/2014/main" id="{CB6D9CCD-049E-490C-BB21-9B334C198AC5}"/>
               </a:ext>
             </a:extLst>
           </p:cNvPr>
@@ -10754,7 +10762,7 @@
           <p:cNvPr id="15" name="">
             <a:extLst xmlns:a="http://schemas.openxmlformats.org/drawingml/2006/main">
               <a:ext uri="{FF2B5EF4-FFF2-40B4-BE49-F238E27FC236}">
-                <a16:creationId xmlns:a16="http://schemas.microsoft.com/office/drawing/2014/main" id="{CA6374C6-68EB-4BCF-83E6-F939D1627021}"/>
+                <a16:creationId xmlns:a16="http://schemas.microsoft.com/office/drawing/2014/main" id="{DEF30FD7-77AA-45F7-B18B-E61517639D58}"/>
               </a:ext>
             </a:extLst>
           </p:cNvPr>
@@ -10809,7 +10817,7 @@
     </p:spTree>
     <p:extLst>
       <p:ext uri="{BB962C8B-B14F-4D97-AF65-F5344CB8AC3E}">
-        <p14:creationId xmlns:p14="http://schemas.microsoft.com/office/powerpoint/2010/main" val="630420154"/>
+        <p14:creationId xmlns:p14="http://schemas.microsoft.com/office/powerpoint/2010/main" val="731529904"/>
       </p:ext>
     </p:extLst>
   </p:cSld>
@@ -10964,7 +10972,7 @@
           <p:cNvPr id="16" name="">
             <a:extLst xmlns:a="http://schemas.openxmlformats.org/drawingml/2006/main">
               <a:ext uri="{FF2B5EF4-FFF2-40B4-BE49-F238E27FC236}">
-                <a16:creationId xmlns:a16="http://schemas.microsoft.com/office/drawing/2014/main" id="{09ADA669-AEE5-429C-B2CD-A9919569F946}"/>
+                <a16:creationId xmlns:a16="http://schemas.microsoft.com/office/drawing/2014/main" id="{522FF745-B965-4FEF-B3DC-68C93F87940D}"/>
               </a:ext>
             </a:extLst>
           </p:cNvPr>
@@ -10996,7 +11004,7 @@
           <p:cNvPr id="2" name="">
             <a:extLst xmlns:a="http://schemas.openxmlformats.org/drawingml/2006/main">
               <a:ext uri="{FF2B5EF4-FFF2-40B4-BE49-F238E27FC236}">
-                <a16:creationId xmlns:a16="http://schemas.microsoft.com/office/drawing/2014/main" id="{6F511D0A-401B-49FA-849C-640792A6B8E1}"/>
+                <a16:creationId xmlns:a16="http://schemas.microsoft.com/office/drawing/2014/main" id="{46DDEE07-1166-4D10-B81F-3BAB30D6A7C0}"/>
               </a:ext>
             </a:extLst>
           </p:cNvPr>
@@ -11053,7 +11061,7 @@
           <p:cNvPr id="3" name="">
             <a:extLst xmlns:a="http://schemas.openxmlformats.org/drawingml/2006/main">
               <a:ext uri="{FF2B5EF4-FFF2-40B4-BE49-F238E27FC236}">
-                <a16:creationId xmlns:a16="http://schemas.microsoft.com/office/drawing/2014/main" id="{D9A06E61-FE1B-4BA6-935D-AC96D72CC403}"/>
+                <a16:creationId xmlns:a16="http://schemas.microsoft.com/office/drawing/2014/main" id="{37DC9712-5090-4D25-8ADC-2603B07464FB}"/>
               </a:ext>
             </a:extLst>
           </p:cNvPr>
@@ -11085,7 +11093,7 @@
           <p:cNvPr id="4" name="">
             <a:extLst xmlns:a="http://schemas.openxmlformats.org/drawingml/2006/main">
               <a:ext uri="{FF2B5EF4-FFF2-40B4-BE49-F238E27FC236}">
-                <a16:creationId xmlns:a16="http://schemas.microsoft.com/office/drawing/2014/main" id="{B8A03BB9-D22D-483A-AFF8-80DF6531EE4C}"/>
+                <a16:creationId xmlns:a16="http://schemas.microsoft.com/office/drawing/2014/main" id="{348A64D0-3B96-4EB8-B39A-E9F39C91C660}"/>
               </a:ext>
             </a:extLst>
           </p:cNvPr>
@@ -11142,7 +11150,7 @@
           <p:cNvPr id="5" name="">
             <a:extLst xmlns:a="http://schemas.openxmlformats.org/drawingml/2006/main">
               <a:ext uri="{FF2B5EF4-FFF2-40B4-BE49-F238E27FC236}">
-                <a16:creationId xmlns:a16="http://schemas.microsoft.com/office/drawing/2014/main" id="{AFF59A9E-D126-41C1-827F-4A36F9FA700F}"/>
+                <a16:creationId xmlns:a16="http://schemas.microsoft.com/office/drawing/2014/main" id="{2FB12DD2-9183-4874-A760-CF249ADB88CA}"/>
               </a:ext>
             </a:extLst>
           </p:cNvPr>
@@ -11199,7 +11207,7 @@
           <p:cNvPr id="6" name="">
             <a:extLst xmlns:a="http://schemas.openxmlformats.org/drawingml/2006/main">
               <a:ext uri="{FF2B5EF4-FFF2-40B4-BE49-F238E27FC236}">
-                <a16:creationId xmlns:a16="http://schemas.microsoft.com/office/drawing/2014/main" id="{9D9123CB-DC31-497A-A3C8-DF8111144526}"/>
+                <a16:creationId xmlns:a16="http://schemas.microsoft.com/office/drawing/2014/main" id="{15D2C721-D558-48A1-81CD-4B1D34626642}"/>
               </a:ext>
             </a:extLst>
           </p:cNvPr>
@@ -11256,7 +11264,7 @@
           <p:cNvPr id="7" name="">
             <a:extLst xmlns:a="http://schemas.openxmlformats.org/drawingml/2006/main">
               <a:ext uri="{FF2B5EF4-FFF2-40B4-BE49-F238E27FC236}">
-                <a16:creationId xmlns:a16="http://schemas.microsoft.com/office/drawing/2014/main" id="{FD4675BB-5847-42C7-8D4D-1AF23BB445D7}"/>
+                <a16:creationId xmlns:a16="http://schemas.microsoft.com/office/drawing/2014/main" id="{429E4088-8254-42C8-8432-DC5D723A071F}"/>
               </a:ext>
             </a:extLst>
           </p:cNvPr>
@@ -11288,7 +11296,7 @@
           <p:cNvPr id="8" name="">
             <a:extLst xmlns:a="http://schemas.openxmlformats.org/drawingml/2006/main">
               <a:ext uri="{FF2B5EF4-FFF2-40B4-BE49-F238E27FC236}">
-                <a16:creationId xmlns:a16="http://schemas.microsoft.com/office/drawing/2014/main" id="{77667103-1D47-480E-A75F-5218AD72DADE}"/>
+                <a16:creationId xmlns:a16="http://schemas.microsoft.com/office/drawing/2014/main" id="{6105D906-C648-4671-8EB3-6FFC73C57E79}"/>
               </a:ext>
             </a:extLst>
           </p:cNvPr>
@@ -11345,7 +11353,7 @@
           <p:cNvPr id="9" name="">
             <a:extLst xmlns:a="http://schemas.openxmlformats.org/drawingml/2006/main">
               <a:ext uri="{FF2B5EF4-FFF2-40B4-BE49-F238E27FC236}">
-                <a16:creationId xmlns:a16="http://schemas.microsoft.com/office/drawing/2014/main" id="{72AA7E73-463C-465B-9B7E-4CEAE7729300}"/>
+                <a16:creationId xmlns:a16="http://schemas.microsoft.com/office/drawing/2014/main" id="{5221E307-2DBA-4949-95E5-64CA0C586ED3}"/>
               </a:ext>
             </a:extLst>
           </p:cNvPr>
@@ -11406,7 +11414,7 @@
           <p:nvPr/>
         </p:nvPicPr>
         <p:blipFill>
-          <a:blip xmlns:r="http://schemas.openxmlformats.org/officeDocument/2006/relationships" xmlns:a="http://schemas.openxmlformats.org/drawingml/2006/main" r:embed="Rdc13393e48894c73"/>
+          <a:blip xmlns:r="http://schemas.openxmlformats.org/officeDocument/2006/relationships" xmlns:a="http://schemas.openxmlformats.org/drawingml/2006/main" r:embed="R1b291b642b8c4675"/>
           <a:stretch xmlns:a="http://schemas.openxmlformats.org/drawingml/2006/main"/>
         </p:blipFill>
         <p:spPr>
@@ -11424,7 +11432,7 @@
           <p:cNvPr id="11" name="">
             <a:extLst xmlns:a="http://schemas.openxmlformats.org/drawingml/2006/main">
               <a:ext uri="{FF2B5EF4-FFF2-40B4-BE49-F238E27FC236}">
-                <a16:creationId xmlns:a16="http://schemas.microsoft.com/office/drawing/2014/main" id="{03C3163D-AC6B-48AE-94A3-6289ADFAB510}"/>
+                <a16:creationId xmlns:a16="http://schemas.microsoft.com/office/drawing/2014/main" id="{F5083A96-E491-488F-A08D-03ED85EFCFF0}"/>
               </a:ext>
             </a:extLst>
           </p:cNvPr>
@@ -11481,7 +11489,7 @@
           <p:cNvPr id="12" name="">
             <a:extLst xmlns:a="http://schemas.openxmlformats.org/drawingml/2006/main">
               <a:ext uri="{FF2B5EF4-FFF2-40B4-BE49-F238E27FC236}">
-                <a16:creationId xmlns:a16="http://schemas.microsoft.com/office/drawing/2014/main" id="{D4E54EE9-2AF5-43E8-B775-95A1DF0F65A8}"/>
+                <a16:creationId xmlns:a16="http://schemas.microsoft.com/office/drawing/2014/main" id="{11760546-E8E5-476C-A2A6-1AD2235F0671}"/>
               </a:ext>
             </a:extLst>
           </p:cNvPr>
@@ -11538,7 +11546,7 @@
           <p:cNvPr id="13" name="">
             <a:extLst xmlns:a="http://schemas.openxmlformats.org/drawingml/2006/main">
               <a:ext uri="{FF2B5EF4-FFF2-40B4-BE49-F238E27FC236}">
-                <a16:creationId xmlns:a16="http://schemas.microsoft.com/office/drawing/2014/main" id="{EC41A549-F30C-491E-B2D8-ED696703F5F7}"/>
+                <a16:creationId xmlns:a16="http://schemas.microsoft.com/office/drawing/2014/main" id="{AED8A4E3-4806-4C9F-991D-B839B9A3FFA8}"/>
               </a:ext>
             </a:extLst>
           </p:cNvPr>
@@ -11570,7 +11578,7 @@
           <p:cNvPr id="14" name="">
             <a:extLst xmlns:a="http://schemas.openxmlformats.org/drawingml/2006/main">
               <a:ext uri="{FF2B5EF4-FFF2-40B4-BE49-F238E27FC236}">
-                <a16:creationId xmlns:a16="http://schemas.microsoft.com/office/drawing/2014/main" id="{8CE66688-EAFC-48ED-BBD3-E3E679E2708B}"/>
+                <a16:creationId xmlns:a16="http://schemas.microsoft.com/office/drawing/2014/main" id="{35448DC3-67C8-4886-923B-70CF5A4E306C}"/>
               </a:ext>
             </a:extLst>
           </p:cNvPr>
@@ -11627,7 +11635,7 @@
           <p:cNvPr id="15" name="">
             <a:extLst xmlns:a="http://schemas.openxmlformats.org/drawingml/2006/main">
               <a:ext uri="{FF2B5EF4-FFF2-40B4-BE49-F238E27FC236}">
-                <a16:creationId xmlns:a16="http://schemas.microsoft.com/office/drawing/2014/main" id="{68232C36-99B1-4DD5-A7D3-E8BAD9C28E6E}"/>
+                <a16:creationId xmlns:a16="http://schemas.microsoft.com/office/drawing/2014/main" id="{65D6F64E-438C-410E-B4D7-E0A2A113C1AA}"/>
               </a:ext>
             </a:extLst>
           </p:cNvPr>
@@ -11682,7 +11690,7 @@
     </p:spTree>
     <p:extLst>
       <p:ext uri="{BB962C8B-B14F-4D97-AF65-F5344CB8AC3E}">
-        <p14:creationId xmlns:p14="http://schemas.microsoft.com/office/powerpoint/2010/main" val="1198824581"/>
+        <p14:creationId xmlns:p14="http://schemas.microsoft.com/office/powerpoint/2010/main" val="1276656132"/>
       </p:ext>
     </p:extLst>
   </p:cSld>
@@ -11837,7 +11845,7 @@
           <p:cNvPr id="23" name="">
             <a:extLst xmlns:a="http://schemas.openxmlformats.org/drawingml/2006/main">
               <a:ext uri="{FF2B5EF4-FFF2-40B4-BE49-F238E27FC236}">
-                <a16:creationId xmlns:a16="http://schemas.microsoft.com/office/drawing/2014/main" id="{33A37E01-6178-4D54-AEE8-FC9B54077B0E}"/>
+                <a16:creationId xmlns:a16="http://schemas.microsoft.com/office/drawing/2014/main" id="{132185A8-C98D-45F4-99B1-7F5513151C89}"/>
               </a:ext>
             </a:extLst>
           </p:cNvPr>
@@ -11869,7 +11877,7 @@
           <p:cNvPr id="2" name="">
             <a:extLst xmlns:a="http://schemas.openxmlformats.org/drawingml/2006/main">
               <a:ext uri="{FF2B5EF4-FFF2-40B4-BE49-F238E27FC236}">
-                <a16:creationId xmlns:a16="http://schemas.microsoft.com/office/drawing/2014/main" id="{3EAFF368-3F74-4754-B049-06ACD7EC6EA7}"/>
+                <a16:creationId xmlns:a16="http://schemas.microsoft.com/office/drawing/2014/main" id="{C5244EEC-1FD0-46D4-BC20-AF0B4EABD8E5}"/>
               </a:ext>
             </a:extLst>
           </p:cNvPr>
@@ -11926,7 +11934,7 @@
           <p:cNvPr id="3" name="">
             <a:extLst xmlns:a="http://schemas.openxmlformats.org/drawingml/2006/main">
               <a:ext uri="{FF2B5EF4-FFF2-40B4-BE49-F238E27FC236}">
-                <a16:creationId xmlns:a16="http://schemas.microsoft.com/office/drawing/2014/main" id="{4723DCF7-F2DF-4E02-B100-957EF5AC6651}"/>
+                <a16:creationId xmlns:a16="http://schemas.microsoft.com/office/drawing/2014/main" id="{91EAF830-AE49-4286-9646-E7975D82F490}"/>
               </a:ext>
             </a:extLst>
           </p:cNvPr>
@@ -11958,7 +11966,7 @@
           <p:cNvPr id="4" name="">
             <a:extLst xmlns:a="http://schemas.openxmlformats.org/drawingml/2006/main">
               <a:ext uri="{FF2B5EF4-FFF2-40B4-BE49-F238E27FC236}">
-                <a16:creationId xmlns:a16="http://schemas.microsoft.com/office/drawing/2014/main" id="{085685F7-6F9C-4A51-A526-9794B213B1AD}"/>
+                <a16:creationId xmlns:a16="http://schemas.microsoft.com/office/drawing/2014/main" id="{2FFDBCD6-53D9-478D-A646-84C1825E5DAC}"/>
               </a:ext>
             </a:extLst>
           </p:cNvPr>
@@ -12015,7 +12023,7 @@
           <p:cNvPr id="5" name="">
             <a:extLst xmlns:a="http://schemas.openxmlformats.org/drawingml/2006/main">
               <a:ext uri="{FF2B5EF4-FFF2-40B4-BE49-F238E27FC236}">
-                <a16:creationId xmlns:a16="http://schemas.microsoft.com/office/drawing/2014/main" id="{6CB37DB0-50CD-415B-AC20-B00B552E3E29}"/>
+                <a16:creationId xmlns:a16="http://schemas.microsoft.com/office/drawing/2014/main" id="{DDA5B88E-BE53-432B-A9D9-5EF1C5C55874}"/>
               </a:ext>
             </a:extLst>
           </p:cNvPr>
@@ -12072,7 +12080,7 @@
           <p:cNvPr id="6" name="">
             <a:extLst xmlns:a="http://schemas.openxmlformats.org/drawingml/2006/main">
               <a:ext uri="{FF2B5EF4-FFF2-40B4-BE49-F238E27FC236}">
-                <a16:creationId xmlns:a16="http://schemas.microsoft.com/office/drawing/2014/main" id="{42C05A0E-206F-4F50-813C-E3B61D57C6AA}"/>
+                <a16:creationId xmlns:a16="http://schemas.microsoft.com/office/drawing/2014/main" id="{E2B04596-AC73-46E2-8706-CA94A7C06601}"/>
               </a:ext>
             </a:extLst>
           </p:cNvPr>
@@ -12129,7 +12137,7 @@
           <p:cNvPr id="7" name="">
             <a:extLst xmlns:a="http://schemas.openxmlformats.org/drawingml/2006/main">
               <a:ext uri="{FF2B5EF4-FFF2-40B4-BE49-F238E27FC236}">
-                <a16:creationId xmlns:a16="http://schemas.microsoft.com/office/drawing/2014/main" id="{81AB8076-5B17-4A5E-BFFB-7FC67386AF53}"/>
+                <a16:creationId xmlns:a16="http://schemas.microsoft.com/office/drawing/2014/main" id="{93786466-E290-473C-B045-591D5BF601D6}"/>
               </a:ext>
             </a:extLst>
           </p:cNvPr>
@@ -12161,7 +12169,7 @@
           <p:cNvPr id="8" name="">
             <a:extLst xmlns:a="http://schemas.openxmlformats.org/drawingml/2006/main">
               <a:ext uri="{FF2B5EF4-FFF2-40B4-BE49-F238E27FC236}">
-                <a16:creationId xmlns:a16="http://schemas.microsoft.com/office/drawing/2014/main" id="{EAB8CF2E-E8C7-4844-ABF4-95AA45EC3072}"/>
+                <a16:creationId xmlns:a16="http://schemas.microsoft.com/office/drawing/2014/main" id="{AADB024C-8FBE-4198-8BDA-9356BD238E7D}"/>
               </a:ext>
             </a:extLst>
           </p:cNvPr>
@@ -12218,7 +12226,7 @@
           <p:cNvPr id="9" name="">
             <a:extLst xmlns:a="http://schemas.openxmlformats.org/drawingml/2006/main">
               <a:ext uri="{FF2B5EF4-FFF2-40B4-BE49-F238E27FC236}">
-                <a16:creationId xmlns:a16="http://schemas.microsoft.com/office/drawing/2014/main" id="{FE9423E8-6F9A-42D7-9F45-FBBB14C8A319}"/>
+                <a16:creationId xmlns:a16="http://schemas.microsoft.com/office/drawing/2014/main" id="{A7D0FC32-9978-4700-B320-07031403904C}"/>
               </a:ext>
             </a:extLst>
           </p:cNvPr>
@@ -12275,7 +12283,7 @@
           <p:cNvPr id="10" name="">
             <a:extLst xmlns:a="http://schemas.openxmlformats.org/drawingml/2006/main">
               <a:ext uri="{FF2B5EF4-FFF2-40B4-BE49-F238E27FC236}">
-                <a16:creationId xmlns:a16="http://schemas.microsoft.com/office/drawing/2014/main" id="{AD03F4CD-454C-44A1-B875-AB091152557A}"/>
+                <a16:creationId xmlns:a16="http://schemas.microsoft.com/office/drawing/2014/main" id="{83EC35A2-6478-4AD5-A357-B810788B6B2E}"/>
               </a:ext>
             </a:extLst>
           </p:cNvPr>
@@ -12309,7 +12317,7 @@
           <p:cNvPr id="11" name="">
             <a:extLst xmlns:a="http://schemas.openxmlformats.org/drawingml/2006/main">
               <a:ext uri="{FF2B5EF4-FFF2-40B4-BE49-F238E27FC236}">
-                <a16:creationId xmlns:a16="http://schemas.microsoft.com/office/drawing/2014/main" id="{4C28C12E-34A8-4CCF-8858-241E71EBFC23}"/>
+                <a16:creationId xmlns:a16="http://schemas.microsoft.com/office/drawing/2014/main" id="{F6BC4E6D-6D12-4375-B4A4-47DFDA99FE57}"/>
               </a:ext>
             </a:extLst>
           </p:cNvPr>
@@ -12341,7 +12349,7 @@
           <p:cNvPr id="12" name="">
             <a:extLst xmlns:a="http://schemas.openxmlformats.org/drawingml/2006/main">
               <a:ext uri="{FF2B5EF4-FFF2-40B4-BE49-F238E27FC236}">
-                <a16:creationId xmlns:a16="http://schemas.microsoft.com/office/drawing/2014/main" id="{C9307EDE-0A11-4F0D-90E3-D86B2097FBE4}"/>
+                <a16:creationId xmlns:a16="http://schemas.microsoft.com/office/drawing/2014/main" id="{D8A78858-DA49-4FFF-9C2E-6C07626B0B26}"/>
               </a:ext>
             </a:extLst>
           </p:cNvPr>
@@ -12398,7 +12406,7 @@
           <p:cNvPr id="13" name="">
             <a:extLst xmlns:a="http://schemas.openxmlformats.org/drawingml/2006/main">
               <a:ext uri="{FF2B5EF4-FFF2-40B4-BE49-F238E27FC236}">
-                <a16:creationId xmlns:a16="http://schemas.microsoft.com/office/drawing/2014/main" id="{A36D9914-6E58-40C1-9517-BF6FB5C2EE6A}"/>
+                <a16:creationId xmlns:a16="http://schemas.microsoft.com/office/drawing/2014/main" id="{718E264F-48A8-4BA2-B678-4D0CEE6FDFAE}"/>
               </a:ext>
             </a:extLst>
           </p:cNvPr>
@@ -12455,7 +12463,7 @@
           <p:cNvPr id="14" name="">
             <a:extLst xmlns:a="http://schemas.openxmlformats.org/drawingml/2006/main">
               <a:ext uri="{FF2B5EF4-FFF2-40B4-BE49-F238E27FC236}">
-                <a16:creationId xmlns:a16="http://schemas.microsoft.com/office/drawing/2014/main" id="{1A5D1705-EFD6-4B48-AD33-472CF5D03317}"/>
+                <a16:creationId xmlns:a16="http://schemas.microsoft.com/office/drawing/2014/main" id="{55FC6551-2CA1-49BD-87F0-E845DDE889DD}"/>
               </a:ext>
             </a:extLst>
           </p:cNvPr>
@@ -12489,7 +12497,7 @@
           <p:cNvPr id="15" name="">
             <a:extLst xmlns:a="http://schemas.openxmlformats.org/drawingml/2006/main">
               <a:ext uri="{FF2B5EF4-FFF2-40B4-BE49-F238E27FC236}">
-                <a16:creationId xmlns:a16="http://schemas.microsoft.com/office/drawing/2014/main" id="{78E4B1CD-A988-4A87-AB8A-60E913E50891}"/>
+                <a16:creationId xmlns:a16="http://schemas.microsoft.com/office/drawing/2014/main" id="{DB6DFC6F-26A7-46CC-AA03-2A3EAC873D35}"/>
               </a:ext>
             </a:extLst>
           </p:cNvPr>
@@ -12521,7 +12529,7 @@
           <p:cNvPr id="16" name="">
             <a:extLst xmlns:a="http://schemas.openxmlformats.org/drawingml/2006/main">
               <a:ext uri="{FF2B5EF4-FFF2-40B4-BE49-F238E27FC236}">
-                <a16:creationId xmlns:a16="http://schemas.microsoft.com/office/drawing/2014/main" id="{2147C80A-6BC0-498D-BA70-1BA75ACC0FCB}"/>
+                <a16:creationId xmlns:a16="http://schemas.microsoft.com/office/drawing/2014/main" id="{C724B3DC-3E48-4C8A-A24B-271440312D6C}"/>
               </a:ext>
             </a:extLst>
           </p:cNvPr>
@@ -12578,7 +12586,7 @@
           <p:cNvPr id="17" name="">
             <a:extLst xmlns:a="http://schemas.openxmlformats.org/drawingml/2006/main">
               <a:ext uri="{FF2B5EF4-FFF2-40B4-BE49-F238E27FC236}">
-                <a16:creationId xmlns:a16="http://schemas.microsoft.com/office/drawing/2014/main" id="{49C5FA5C-E64A-4AA3-A09B-C5E5C2D75F82}"/>
+                <a16:creationId xmlns:a16="http://schemas.microsoft.com/office/drawing/2014/main" id="{ED5C428B-14CA-4D46-8F12-E5BF5D317BCC}"/>
               </a:ext>
             </a:extLst>
           </p:cNvPr>
@@ -12635,7 +12643,7 @@
           <p:cNvPr id="18" name="">
             <a:extLst xmlns:a="http://schemas.openxmlformats.org/drawingml/2006/main">
               <a:ext uri="{FF2B5EF4-FFF2-40B4-BE49-F238E27FC236}">
-                <a16:creationId xmlns:a16="http://schemas.microsoft.com/office/drawing/2014/main" id="{7A00E0BA-8C10-415E-9BE6-BE8C56B18532}"/>
+                <a16:creationId xmlns:a16="http://schemas.microsoft.com/office/drawing/2014/main" id="{DEF5B1C7-96D6-4A24-8815-89551E5BF7DC}"/>
               </a:ext>
             </a:extLst>
           </p:cNvPr>
@@ -12669,7 +12677,7 @@
           <p:cNvPr id="19" name="">
             <a:extLst xmlns:a="http://schemas.openxmlformats.org/drawingml/2006/main">
               <a:ext uri="{FF2B5EF4-FFF2-40B4-BE49-F238E27FC236}">
-                <a16:creationId xmlns:a16="http://schemas.microsoft.com/office/drawing/2014/main" id="{4118AA79-42CE-4143-A19A-E3A488265CDB}"/>
+                <a16:creationId xmlns:a16="http://schemas.microsoft.com/office/drawing/2014/main" id="{B84E5069-D04D-4CE5-9C10-C95CB4087649}"/>
               </a:ext>
             </a:extLst>
           </p:cNvPr>
@@ -12701,7 +12709,7 @@
           <p:cNvPr id="20" name="">
             <a:extLst xmlns:a="http://schemas.openxmlformats.org/drawingml/2006/main">
               <a:ext uri="{FF2B5EF4-FFF2-40B4-BE49-F238E27FC236}">
-                <a16:creationId xmlns:a16="http://schemas.microsoft.com/office/drawing/2014/main" id="{A17A53C1-7564-48DC-8F3F-78F730C812ED}"/>
+                <a16:creationId xmlns:a16="http://schemas.microsoft.com/office/drawing/2014/main" id="{BBD1C097-A670-407A-ADEA-840BFEBBBEB9}"/>
               </a:ext>
             </a:extLst>
           </p:cNvPr>
@@ -12758,7 +12766,7 @@
           <p:cNvPr id="21" name="">
             <a:extLst xmlns:a="http://schemas.openxmlformats.org/drawingml/2006/main">
               <a:ext uri="{FF2B5EF4-FFF2-40B4-BE49-F238E27FC236}">
-                <a16:creationId xmlns:a16="http://schemas.microsoft.com/office/drawing/2014/main" id="{8CCBA2A7-D318-4255-A631-92095C52F356}"/>
+                <a16:creationId xmlns:a16="http://schemas.microsoft.com/office/drawing/2014/main" id="{3557A812-081C-4304-916A-540E76F4A1A8}"/>
               </a:ext>
             </a:extLst>
           </p:cNvPr>
@@ -12815,7 +12823,7 @@
           <p:cNvPr id="22" name="">
             <a:extLst xmlns:a="http://schemas.openxmlformats.org/drawingml/2006/main">
               <a:ext uri="{FF2B5EF4-FFF2-40B4-BE49-F238E27FC236}">
-                <a16:creationId xmlns:a16="http://schemas.microsoft.com/office/drawing/2014/main" id="{10FD4D75-6BC1-4F5A-BEEA-E900829C5545}"/>
+                <a16:creationId xmlns:a16="http://schemas.microsoft.com/office/drawing/2014/main" id="{2BAA0809-3F64-475A-B230-53151C155971}"/>
               </a:ext>
             </a:extLst>
           </p:cNvPr>
@@ -12870,7 +12878,7 @@
     </p:spTree>
     <p:extLst>
       <p:ext uri="{BB962C8B-B14F-4D97-AF65-F5344CB8AC3E}">
-        <p14:creationId xmlns:p14="http://schemas.microsoft.com/office/powerpoint/2010/main" val="1914661665"/>
+        <p14:creationId xmlns:p14="http://schemas.microsoft.com/office/powerpoint/2010/main" val="1583246450"/>
       </p:ext>
     </p:extLst>
   </p:cSld>
@@ -13071,7 +13079,7 @@
           <p:cNvPr id="22" name="">
             <a:extLst xmlns:a="http://schemas.openxmlformats.org/drawingml/2006/main">
               <a:ext uri="{FF2B5EF4-FFF2-40B4-BE49-F238E27FC236}">
-                <a16:creationId xmlns:a16="http://schemas.microsoft.com/office/drawing/2014/main" id="{12A71EB4-5FE3-4741-AA51-94B0F71E5FA1}"/>
+                <a16:creationId xmlns:a16="http://schemas.microsoft.com/office/drawing/2014/main" id="{73DCDB41-AFC5-4D27-8B11-09C448B6CF34}"/>
               </a:ext>
             </a:extLst>
           </p:cNvPr>
@@ -13103,7 +13111,7 @@
           <p:cNvPr id="2" name="">
             <a:extLst xmlns:a="http://schemas.openxmlformats.org/drawingml/2006/main">
               <a:ext uri="{FF2B5EF4-FFF2-40B4-BE49-F238E27FC236}">
-                <a16:creationId xmlns:a16="http://schemas.microsoft.com/office/drawing/2014/main" id="{D99CAE00-1D76-49D8-A0F9-8FC8B5DBD32C}"/>
+                <a16:creationId xmlns:a16="http://schemas.microsoft.com/office/drawing/2014/main" id="{D0F0498D-4910-48A9-8342-4FDD697BDCA8}"/>
               </a:ext>
             </a:extLst>
           </p:cNvPr>
@@ -13160,7 +13168,7 @@
           <p:cNvPr id="3" name="">
             <a:extLst xmlns:a="http://schemas.openxmlformats.org/drawingml/2006/main">
               <a:ext uri="{FF2B5EF4-FFF2-40B4-BE49-F238E27FC236}">
-                <a16:creationId xmlns:a16="http://schemas.microsoft.com/office/drawing/2014/main" id="{9DE4CB8E-E40D-4B0D-9E31-E8B02B92AF9D}"/>
+                <a16:creationId xmlns:a16="http://schemas.microsoft.com/office/drawing/2014/main" id="{E99E8601-0F9F-4658-A8A7-F1124AACB10F}"/>
               </a:ext>
             </a:extLst>
           </p:cNvPr>
@@ -13192,7 +13200,7 @@
           <p:cNvPr id="4" name="">
             <a:extLst xmlns:a="http://schemas.openxmlformats.org/drawingml/2006/main">
               <a:ext uri="{FF2B5EF4-FFF2-40B4-BE49-F238E27FC236}">
-                <a16:creationId xmlns:a16="http://schemas.microsoft.com/office/drawing/2014/main" id="{63732491-FE3F-4912-9CBA-B91876C7580B}"/>
+                <a16:creationId xmlns:a16="http://schemas.microsoft.com/office/drawing/2014/main" id="{B33BE7F8-DA4E-4E92-8FE3-402DF9624D94}"/>
               </a:ext>
             </a:extLst>
           </p:cNvPr>
@@ -13249,7 +13257,7 @@
           <p:cNvPr id="5" name="">
             <a:extLst xmlns:a="http://schemas.openxmlformats.org/drawingml/2006/main">
               <a:ext uri="{FF2B5EF4-FFF2-40B4-BE49-F238E27FC236}">
-                <a16:creationId xmlns:a16="http://schemas.microsoft.com/office/drawing/2014/main" id="{60373F31-BFC6-4845-93D9-4C99DD6E1320}"/>
+                <a16:creationId xmlns:a16="http://schemas.microsoft.com/office/drawing/2014/main" id="{F13C7BD5-B3A1-4A86-8947-A9EB35523FD1}"/>
               </a:ext>
             </a:extLst>
           </p:cNvPr>
@@ -13306,7 +13314,7 @@
           <p:cNvPr id="6" name="">
             <a:extLst xmlns:a="http://schemas.openxmlformats.org/drawingml/2006/main">
               <a:ext uri="{FF2B5EF4-FFF2-40B4-BE49-F238E27FC236}">
-                <a16:creationId xmlns:a16="http://schemas.microsoft.com/office/drawing/2014/main" id="{98144664-6823-4D6E-87B9-BEB0AB39F920}"/>
+                <a16:creationId xmlns:a16="http://schemas.microsoft.com/office/drawing/2014/main" id="{397229BA-B103-4A88-B683-9992899BC661}"/>
               </a:ext>
             </a:extLst>
           </p:cNvPr>
@@ -13363,7 +13371,7 @@
           <p:cNvPr id="7" name="">
             <a:extLst xmlns:a="http://schemas.openxmlformats.org/drawingml/2006/main">
               <a:ext uri="{FF2B5EF4-FFF2-40B4-BE49-F238E27FC236}">
-                <a16:creationId xmlns:a16="http://schemas.microsoft.com/office/drawing/2014/main" id="{D8ECC906-8477-4147-9465-0EA503B281AA}"/>
+                <a16:creationId xmlns:a16="http://schemas.microsoft.com/office/drawing/2014/main" id="{6046893F-6E12-4ED1-AC5E-6D29B93C408F}"/>
               </a:ext>
             </a:extLst>
           </p:cNvPr>
@@ -13395,7 +13403,7 @@
           <p:cNvPr id="8" name="">
             <a:extLst xmlns:a="http://schemas.openxmlformats.org/drawingml/2006/main">
               <a:ext uri="{FF2B5EF4-FFF2-40B4-BE49-F238E27FC236}">
-                <a16:creationId xmlns:a16="http://schemas.microsoft.com/office/drawing/2014/main" id="{87CADA0C-60FE-4AC8-B166-1FE5E9D87A8E}"/>
+                <a16:creationId xmlns:a16="http://schemas.microsoft.com/office/drawing/2014/main" id="{627E9DD6-9D74-4E3C-8E40-87C283980763}"/>
               </a:ext>
             </a:extLst>
           </p:cNvPr>
@@ -13452,7 +13460,7 @@
           <p:cNvPr id="9" name="">
             <a:extLst xmlns:a="http://schemas.openxmlformats.org/drawingml/2006/main">
               <a:ext uri="{FF2B5EF4-FFF2-40B4-BE49-F238E27FC236}">
-                <a16:creationId xmlns:a16="http://schemas.microsoft.com/office/drawing/2014/main" id="{B3B4E1CC-6565-402C-921D-38841A7FEC9E}"/>
+                <a16:creationId xmlns:a16="http://schemas.microsoft.com/office/drawing/2014/main" id="{810745CF-7587-493D-9016-9A71F35733FA}"/>
               </a:ext>
             </a:extLst>
           </p:cNvPr>
@@ -13509,7 +13517,7 @@
           <p:cNvPr id="10" name="">
             <a:extLst xmlns:a="http://schemas.openxmlformats.org/drawingml/2006/main">
               <a:ext uri="{FF2B5EF4-FFF2-40B4-BE49-F238E27FC236}">
-                <a16:creationId xmlns:a16="http://schemas.microsoft.com/office/drawing/2014/main" id="{1A4AEAED-17AE-445F-8CE8-D41EA06077AA}"/>
+                <a16:creationId xmlns:a16="http://schemas.microsoft.com/office/drawing/2014/main" id="{9B2D964F-BAFF-4727-A8D1-9FB73248B11B}"/>
               </a:ext>
             </a:extLst>
           </p:cNvPr>
@@ -13543,7 +13551,7 @@
           <p:cNvPr id="11" name="">
             <a:extLst xmlns:a="http://schemas.openxmlformats.org/drawingml/2006/main">
               <a:ext uri="{FF2B5EF4-FFF2-40B4-BE49-F238E27FC236}">
-                <a16:creationId xmlns:a16="http://schemas.microsoft.com/office/drawing/2014/main" id="{E1F8A05F-835E-4DC5-8A13-6032B7A3FB5C}"/>
+                <a16:creationId xmlns:a16="http://schemas.microsoft.com/office/drawing/2014/main" id="{9FAF2725-4DFF-4EDB-AEB1-BBB656C3CC63}"/>
               </a:ext>
             </a:extLst>
           </p:cNvPr>
@@ -13575,7 +13583,7 @@
           <p:cNvPr id="12" name="">
             <a:extLst xmlns:a="http://schemas.openxmlformats.org/drawingml/2006/main">
               <a:ext uri="{FF2B5EF4-FFF2-40B4-BE49-F238E27FC236}">
-                <a16:creationId xmlns:a16="http://schemas.microsoft.com/office/drawing/2014/main" id="{50BDF1A0-1DB1-4A8A-AC40-F18A7D1467EB}"/>
+                <a16:creationId xmlns:a16="http://schemas.microsoft.com/office/drawing/2014/main" id="{967531E4-A779-4C0F-A4F3-37DEFE0CF60D}"/>
               </a:ext>
             </a:extLst>
           </p:cNvPr>
@@ -13632,7 +13640,7 @@
           <p:cNvPr id="13" name="">
             <a:extLst xmlns:a="http://schemas.openxmlformats.org/drawingml/2006/main">
               <a:ext uri="{FF2B5EF4-FFF2-40B4-BE49-F238E27FC236}">
-                <a16:creationId xmlns:a16="http://schemas.microsoft.com/office/drawing/2014/main" id="{BB89F699-132D-401E-8C5C-1EB980659AFD}"/>
+                <a16:creationId xmlns:a16="http://schemas.microsoft.com/office/drawing/2014/main" id="{9B5FA4C9-3C9F-42EE-96E9-9157691D0976}"/>
               </a:ext>
             </a:extLst>
           </p:cNvPr>
@@ -13689,7 +13697,7 @@
           <p:cNvPr id="14" name="">
             <a:extLst xmlns:a="http://schemas.openxmlformats.org/drawingml/2006/main">
               <a:ext uri="{FF2B5EF4-FFF2-40B4-BE49-F238E27FC236}">
-                <a16:creationId xmlns:a16="http://schemas.microsoft.com/office/drawing/2014/main" id="{B084B44B-FEC2-40EE-913F-D34E14983973}"/>
+                <a16:creationId xmlns:a16="http://schemas.microsoft.com/office/drawing/2014/main" id="{05EAD6B1-6774-4850-A40C-FA4315057B7F}"/>
               </a:ext>
             </a:extLst>
           </p:cNvPr>
@@ -13723,7 +13731,7 @@
           <p:cNvPr id="15" name="">
             <a:extLst xmlns:a="http://schemas.openxmlformats.org/drawingml/2006/main">
               <a:ext uri="{FF2B5EF4-FFF2-40B4-BE49-F238E27FC236}">
-                <a16:creationId xmlns:a16="http://schemas.microsoft.com/office/drawing/2014/main" id="{EC0FA568-3DCE-4694-A05D-A4A07C8FA492}"/>
+                <a16:creationId xmlns:a16="http://schemas.microsoft.com/office/drawing/2014/main" id="{C196710E-238B-41CB-ADE3-97B808001020}"/>
               </a:ext>
             </a:extLst>
           </p:cNvPr>
@@ -13755,7 +13763,7 @@
           <p:cNvPr id="16" name="">
             <a:extLst xmlns:a="http://schemas.openxmlformats.org/drawingml/2006/main">
               <a:ext uri="{FF2B5EF4-FFF2-40B4-BE49-F238E27FC236}">
-                <a16:creationId xmlns:a16="http://schemas.microsoft.com/office/drawing/2014/main" id="{457E1D7F-8FAA-4CD1-8A07-BD7478A6573B}"/>
+                <a16:creationId xmlns:a16="http://schemas.microsoft.com/office/drawing/2014/main" id="{08A897BF-F285-4987-822A-AAF20D8393BA}"/>
               </a:ext>
             </a:extLst>
           </p:cNvPr>
@@ -13812,7 +13820,7 @@
           <p:cNvPr id="17" name="">
             <a:extLst xmlns:a="http://schemas.openxmlformats.org/drawingml/2006/main">
               <a:ext uri="{FF2B5EF4-FFF2-40B4-BE49-F238E27FC236}">
-                <a16:creationId xmlns:a16="http://schemas.microsoft.com/office/drawing/2014/main" id="{595BAD25-95D9-49AE-A22D-835ED36C5C10}"/>
+                <a16:creationId xmlns:a16="http://schemas.microsoft.com/office/drawing/2014/main" id="{5A88BE1A-8DDE-4F55-ADBC-142435237FB3}"/>
               </a:ext>
             </a:extLst>
           </p:cNvPr>
@@ -13869,7 +13877,7 @@
           <p:cNvPr id="18" name="">
             <a:extLst xmlns:a="http://schemas.openxmlformats.org/drawingml/2006/main">
               <a:ext uri="{FF2B5EF4-FFF2-40B4-BE49-F238E27FC236}">
-                <a16:creationId xmlns:a16="http://schemas.microsoft.com/office/drawing/2014/main" id="{4BAADB61-3F5F-4E97-B689-5E8AB7CFA58D}"/>
+                <a16:creationId xmlns:a16="http://schemas.microsoft.com/office/drawing/2014/main" id="{5BF297DF-FBD1-4EAE-B474-48BF5C1721A7}"/>
               </a:ext>
             </a:extLst>
           </p:cNvPr>
@@ -13903,7 +13911,7 @@
           <p:cNvPr id="19" name="">
             <a:extLst xmlns:a="http://schemas.openxmlformats.org/drawingml/2006/main">
               <a:ext uri="{FF2B5EF4-FFF2-40B4-BE49-F238E27FC236}">
-                <a16:creationId xmlns:a16="http://schemas.microsoft.com/office/drawing/2014/main" id="{F9C4D259-1351-4DCF-86E4-E1DE15BDACE6}"/>
+                <a16:creationId xmlns:a16="http://schemas.microsoft.com/office/drawing/2014/main" id="{F0394F24-CE5D-43BC-AD0B-7553A6527F70}"/>
               </a:ext>
             </a:extLst>
           </p:cNvPr>
@@ -13935,7 +13943,7 @@
           <p:cNvPr id="20" name="">
             <a:extLst xmlns:a="http://schemas.openxmlformats.org/drawingml/2006/main">
               <a:ext uri="{FF2B5EF4-FFF2-40B4-BE49-F238E27FC236}">
-                <a16:creationId xmlns:a16="http://schemas.microsoft.com/office/drawing/2014/main" id="{78541311-5AFD-4B5D-8F5E-6E9AE94A05B4}"/>
+                <a16:creationId xmlns:a16="http://schemas.microsoft.com/office/drawing/2014/main" id="{36E4E864-1DED-40C1-9792-65BCEB784626}"/>
               </a:ext>
             </a:extLst>
           </p:cNvPr>
@@ -13992,7 +14000,7 @@
           <p:cNvPr id="21" name="">
             <a:extLst xmlns:a="http://schemas.openxmlformats.org/drawingml/2006/main">
               <a:ext uri="{FF2B5EF4-FFF2-40B4-BE49-F238E27FC236}">
-                <a16:creationId xmlns:a16="http://schemas.microsoft.com/office/drawing/2014/main" id="{FEB84E03-4AF8-40AA-8C43-74D0563D8A46}"/>
+                <a16:creationId xmlns:a16="http://schemas.microsoft.com/office/drawing/2014/main" id="{B8B3B410-DCDE-40AB-B031-03E3DC3489F1}"/>
               </a:ext>
             </a:extLst>
           </p:cNvPr>
@@ -14047,7 +14055,7 @@
     </p:spTree>
     <p:extLst>
       <p:ext uri="{BB962C8B-B14F-4D97-AF65-F5344CB8AC3E}">
-        <p14:creationId xmlns:p14="http://schemas.microsoft.com/office/powerpoint/2010/main" val="1467226819"/>
+        <p14:creationId xmlns:p14="http://schemas.microsoft.com/office/powerpoint/2010/main" val="2063295952"/>
       </p:ext>
     </p:extLst>
   </p:cSld>
